--- a/納品レポート/ホテル別レポート/チサンホテル浜松町_口コミ分析レポート.pptx
+++ b/納品レポート/ホテル別レポート/チサンホテル浜松町_口コミ分析レポート.pptx
@@ -137,7 +137,7 @@
               <c:strCache>
                 <c:ptCount val="1"/>
                 <c:pt idx="0">
-                  <c:v>10pt換算</c:v>
+                  <c:v>10pt換算平均</c:v>
                 </c:pt>
               </c:strCache>
             </c:strRef>
@@ -390,7 +390,7 @@
               <c:strCache>
                 <c:ptCount val="1"/>
                 <c:pt idx="0">
-                  <c:v>評価分布</c:v>
+                  <c:v>評価分布（10pt換算）</c:v>
                 </c:pt>
               </c:strCache>
             </c:strRef>
@@ -433,7 +433,7 @@
             <c:bubble3D val="0"/>
             <c:spPr>
               <a:solidFill>
-                <a:srgbClr val="DC2626"/>
+                <a:srgbClr val="D4A843"/>
               </a:solidFill>
               <a:effectLst/>
             </c:spPr>
@@ -724,7 +724,7 @@
             <c:bubble3D val="0"/>
             <c:spPr>
               <a:solidFill>
-                <a:srgbClr val="DC2626"/>
+                <a:srgbClr val="D4A843"/>
               </a:solidFill>
               <a:effectLst/>
             </c:spPr>
@@ -735,7 +735,7 @@
             <c:bubble3D val="0"/>
             <c:spPr>
               <a:solidFill>
-                <a:srgbClr val="DC2626"/>
+                <a:srgbClr val="D4A843"/>
               </a:solidFill>
               <a:effectLst/>
             </c:spPr>
@@ -2761,7 +2761,7 @@
                 <a:ea typeface="Arial" pitchFamily="34" charset="-122"/>
                 <a:cs typeface="Arial" pitchFamily="34" charset="-120"/>
               </a:rPr>
-              <a:t>作成日：2026年3月7日</a:t>
+              <a:t>作成日：2026年3月28日</a:t>
             </a:r>
             <a:endParaRPr lang="en-US" sz="1000" dirty="0"/>
           </a:p>
@@ -2940,7 +2940,7 @@
                 <a:ea typeface="Arial" pitchFamily="34" charset="-122"/>
                 <a:cs typeface="Arial" pitchFamily="34" charset="-120"/>
               </a:rPr>
-              <a:t>当ホテルは全体平均7.15点（10pt換算）、高評価率59.6%と中程度の水準を維持しています。</a:t>
+              <a:t>チサンホテル浜松町は複数路線・複数駅へのアクセスという強固な立地優位性を持ちながら、設備の老朽化（10件）と騒音問題（8件）が全体平均7.15点・低評価率21.3%という数字に反映されています。</a:t>
             </a:r>
             <a:endParaRPr lang="en-US" sz="1200" dirty="0"/>
           </a:p>
@@ -2969,7 +2969,7 @@
                 <a:ea typeface="Arial" pitchFamily="34" charset="-122"/>
                 <a:cs typeface="Arial" pitchFamily="34" charset="-120"/>
               </a:rPr>
-              <a:t>「立地」「コスパ」「朝食」の強みは健在であり、海外OTAでの安定した高評価は基本品質の良さを示しています。</a:t>
+              <a:t>最優先すべきはPhase 1の設備不具合緊急修繕とアクセス案内改善です。浴槽の穴・ヒビなど安全に関わる不具合の即時修繕と、写真付き道順マップのOTA掲載は追加投資なしに実施でき、Googleスコアの改善に直結します。</a:t>
             </a:r>
             <a:endParaRPr lang="en-US" sz="1200" dirty="0"/>
           </a:p>
@@ -2998,7 +2998,7 @@
                 <a:ea typeface="Arial" pitchFamily="34" charset="-122"/>
                 <a:cs typeface="Arial" pitchFamily="34" charset="-120"/>
               </a:rPr>
-              <a:t>Google（3.08/5）とじゃらん（3.43/5）の国内サイト評価の改善が全体水準向上の鍵です。設備老朽化・騒音・水回りの課題に計画的に対応します。</a:t>
+              <a:t>Phase 2の防音対策（防音カーテン・二重窓）はホテルの評価を最も大きく引き下げている騒音問題への直接的な対処であり、投資優先度が高い施策です。Phase 3のリノベーションは抜本的な評価改善をもたらす長期的投資として計画的に進めてください。</a:t>
             </a:r>
             <a:endParaRPr lang="en-US" sz="1200" dirty="0"/>
           </a:p>
@@ -3027,7 +3027,7 @@
                 <a:ea typeface="Arial" pitchFamily="34" charset="-122"/>
                 <a:cs typeface="Arial" pitchFamily="34" charset="-120"/>
               </a:rPr>
-              <a:t>Phase 1のオペレーション改善を着実に推進し、月次モニタリングで効果を検証していきましょう。</a:t>
+              <a:t>段階的な改善を着実に実行することで、2026年9月末までに全体平均7.8点・低評価率10%以下の達成を目指しましょう。</a:t>
             </a:r>
             <a:endParaRPr lang="en-US" sz="1200" dirty="0"/>
           </a:p>
@@ -3517,7 +3517,7 @@
             <a:avLst/>
           </a:prstGeom>
           <a:solidFill>
-            <a:srgbClr val="EA580C"/>
+            <a:srgbClr val="16A34A"/>
           </a:solidFill>
           <a:ln/>
         </p:spPr>
@@ -3588,7 +3588,7 @@
             <a:r>
               <a:rPr lang="en-US" sz="3200" b="1" dirty="0">
                 <a:solidFill>
-                  <a:srgbClr val="EA580C"/>
+                  <a:srgbClr val="16A34A"/>
                 </a:solidFill>
                 <a:latin typeface="Arial" pitchFamily="34" charset="0"/>
                 <a:ea typeface="Arial" pitchFamily="34" charset="-122"/>
@@ -3867,7 +3867,7 @@
                 <a:ea typeface="Arial" pitchFamily="34" charset="-122"/>
                 <a:cs typeface="Arial" pitchFamily="34" charset="-120"/>
               </a:rPr>
-              <a:t>  34%が言及。浜松町駅近く、羽田直結</a:t>
+              <a:t>  浜松町・大門・田町・日の出（ゆりかもめ）の複数路線が徒歩圏内（18件）</a:t>
             </a:r>
             <a:endParaRPr lang="en-US" sz="1100" dirty="0"/>
           </a:p>
@@ -3887,7 +3887,7 @@
                 <a:ea typeface="Arial" pitchFamily="34" charset="-122"/>
                 <a:cs typeface="Arial" pitchFamily="34" charset="-120"/>
               </a:rPr>
-              <a:t>コストパフォーマンス </a:t>
+              <a:t>コスパの良さ </a:t>
             </a:r>
             <a:endParaRPr lang="en-US" sz="1100" dirty="0"/>
           </a:p>
@@ -3907,7 +3907,7 @@
                 <a:ea typeface="Arial" pitchFamily="34" charset="-122"/>
                 <a:cs typeface="Arial" pitchFamily="34" charset="-120"/>
               </a:rPr>
-              <a:t>  25%が言及。リーズナブルな料金設定</a:t>
+              <a:t>  老朽化を補うほどの価格魅力。価格帯に見合った価値を提供（8件）</a:t>
             </a:r>
             <a:endParaRPr lang="en-US" sz="1100" dirty="0"/>
           </a:p>
@@ -3927,7 +3927,7 @@
                 <a:ea typeface="Arial" pitchFamily="34" charset="-122"/>
                 <a:cs typeface="Arial" pitchFamily="34" charset="-120"/>
               </a:rPr>
-              <a:t>朝食・清潔感 </a:t>
+              <a:t>朝食の質 </a:t>
             </a:r>
             <a:endParaRPr lang="en-US" sz="1100" dirty="0"/>
           </a:p>
@@ -3947,7 +3947,7 @@
                 <a:ea typeface="Arial" pitchFamily="34" charset="-122"/>
                 <a:cs typeface="Arial" pitchFamily="34" charset="-120"/>
               </a:rPr>
-              <a:t>  朝食7件、清潔感10件。基盤は健在</a:t>
+              <a:t>  彩りと栄養バランスの良い朝食が一部ゲストから高評価（7件）</a:t>
             </a:r>
             <a:endParaRPr lang="en-US" sz="1100" dirty="0"/>
           </a:p>
@@ -4075,7 +4075,7 @@
                 <a:ea typeface="Arial" pitchFamily="34" charset="-122"/>
                 <a:cs typeface="Arial" pitchFamily="34" charset="-120"/>
               </a:rPr>
-              <a:t>設備老朽化 </a:t>
+              <a:t>設備の老朽化 </a:t>
             </a:r>
             <a:endParaRPr lang="en-US" sz="1100" dirty="0"/>
           </a:p>
@@ -4095,7 +4095,7 @@
                 <a:ea typeface="Arial" pitchFamily="34" charset="-122"/>
                 <a:cs typeface="Arial" pitchFamily="34" charset="-120"/>
               </a:rPr>
-              <a:t>  壁紙・カーペット・家具の経年劣化（10件）</a:t>
+              <a:t>  浴槽の不具合・廊下の劣化・ハウスダスト問題など設備劣化の指摘が多数（10件）</a:t>
             </a:r>
             <a:endParaRPr lang="en-US" sz="1100" dirty="0"/>
           </a:p>
@@ -4115,7 +4115,7 @@
                 <a:ea typeface="Arial" pitchFamily="34" charset="-122"/>
                 <a:cs typeface="Arial" pitchFamily="34" charset="-120"/>
               </a:rPr>
-              <a:t>騒音・防音 </a:t>
+              <a:t>騒音・防音の問題 </a:t>
             </a:r>
             <a:endParaRPr lang="en-US" sz="1100" dirty="0"/>
           </a:p>
@@ -4135,7 +4135,7 @@
                 <a:ea typeface="Arial" pitchFamily="34" charset="-122"/>
                 <a:cs typeface="Arial" pitchFamily="34" charset="-120"/>
               </a:rPr>
-              <a:t>  隣室音・外部騒音・設備音（9件）</a:t>
+              <a:t>  線路側客室での電車騒音が睡眠を妨げるレベルで言及（8件）</a:t>
             </a:r>
             <a:endParaRPr lang="en-US" sz="1100" dirty="0"/>
           </a:p>
@@ -4155,7 +4155,7 @@
                 <a:ea typeface="Arial" pitchFamily="34" charset="-122"/>
                 <a:cs typeface="Arial" pitchFamily="34" charset="-120"/>
               </a:rPr>
-              <a:t>水回り・清掃 </a:t>
+              <a:t>アクセスの分かりにくさ </a:t>
             </a:r>
             <a:endParaRPr lang="en-US" sz="1100" dirty="0"/>
           </a:p>
@@ -4175,7 +4175,7 @@
                 <a:ea typeface="Arial" pitchFamily="34" charset="-122"/>
                 <a:cs typeface="Arial" pitchFamily="34" charset="-120"/>
               </a:rPr>
-              <a:t>  水圧弱い・排水遅い（6件）/ 清掃不足（5件）</a:t>
+              <a:t>  駅から遠い・わかりにくいとの指摘。案内改善が急務（3件）</a:t>
             </a:r>
             <a:endParaRPr lang="en-US" sz="1100" dirty="0"/>
           </a:p>
@@ -4547,7 +4547,7 @@
                 <a:ea typeface="Arial" pitchFamily="34" charset="-122"/>
                 <a:cs typeface="Arial" pitchFamily="34" charset="-120"/>
               </a:rPr>
-              <a:t>改善のポイント</a:t>
+              <a:t>サイト別パフォーマンス分析</a:t>
             </a:r>
             <a:endParaRPr lang="en-US" sz="1100" dirty="0"/>
           </a:p>
@@ -4576,7 +4576,7 @@
                 <a:ea typeface="Arial" pitchFamily="34" charset="-122"/>
                 <a:cs typeface="Arial" pitchFamily="34" charset="-120"/>
               </a:rPr>
-              <a:t>海外OTA：安定した高評価</a:t>
+              <a:t>海外OTA強み</a:t>
             </a:r>
             <a:endParaRPr lang="en-US" sz="1100" dirty="0"/>
           </a:p>
@@ -4596,7 +4596,36 @@
                 <a:ea typeface="Arial" pitchFamily="34" charset="-122"/>
                 <a:cs typeface="Arial" pitchFamily="34" charset="-120"/>
               </a:rPr>
-              <a:t>Agoda 8.67 / Booking 8.00</a:t>
+              <a:t>Agoda（8.67点）とBooking.com（8.0点）では良好水準を確保</a:t>
+            </a:r>
+            <a:endParaRPr lang="en-US" sz="1100" dirty="0"/>
+          </a:p>
+          <a:p>
+            <a:pPr indent="0" marL="0">
+              <a:spcAft>
+                <a:spcPts val="200"/>
+              </a:spcAft>
+              <a:buNone/>
+            </a:pPr>
+            <a:endParaRPr lang="en-US" sz="1100" dirty="0"/>
+          </a:p>
+          <a:p>
+            <a:pPr indent="0" marL="0">
+              <a:spcAft>
+                <a:spcPts val="200"/>
+              </a:spcAft>
+              <a:buNone/>
+            </a:pPr>
+            <a:r>
+              <a:rPr lang="en-US" sz="1100" b="1" dirty="0">
+                <a:solidFill>
+                  <a:srgbClr val="DC2626"/>
+                </a:solidFill>
+                <a:latin typeface="Arial" pitchFamily="34" charset="0"/>
+                <a:ea typeface="Arial" pitchFamily="34" charset="-122"/>
+                <a:cs typeface="Arial" pitchFamily="34" charset="-120"/>
+              </a:rPr>
+              <a:t>国内サイト要改善</a:t>
             </a:r>
             <a:endParaRPr lang="en-US" sz="1100" dirty="0"/>
           </a:p>
@@ -4616,76 +4645,7 @@
                 <a:ea typeface="Arial" pitchFamily="34" charset="-122"/>
                 <a:cs typeface="Arial" pitchFamily="34" charset="-120"/>
               </a:rPr>
-              <a:t>外国人旅行者の満足度は良好</a:t>
-            </a:r>
-            <a:endParaRPr lang="en-US" sz="1100" dirty="0"/>
-          </a:p>
-          <a:p>
-            <a:pPr indent="0" marL="0">
-              <a:spcAft>
-                <a:spcPts val="200"/>
-              </a:spcAft>
-              <a:buNone/>
-            </a:pPr>
-            <a:endParaRPr lang="en-US" sz="1100" dirty="0"/>
-          </a:p>
-          <a:p>
-            <a:pPr indent="0" marL="0">
-              <a:spcAft>
-                <a:spcPts val="200"/>
-              </a:spcAft>
-              <a:buNone/>
-            </a:pPr>
-            <a:r>
-              <a:rPr lang="en-US" sz="1100" b="1" dirty="0">
-                <a:solidFill>
-                  <a:srgbClr val="EA580C"/>
-                </a:solidFill>
-                <a:latin typeface="Arial" pitchFamily="34" charset="0"/>
-                <a:ea typeface="Arial" pitchFamily="34" charset="-122"/>
-                <a:cs typeface="Arial" pitchFamily="34" charset="-120"/>
-              </a:rPr>
-              <a:t>国内サイト：改善余地あり</a:t>
-            </a:r>
-            <a:endParaRPr lang="en-US" sz="1100" dirty="0"/>
-          </a:p>
-          <a:p>
-            <a:pPr indent="0" marL="0">
-              <a:spcAft>
-                <a:spcPts val="200"/>
-              </a:spcAft>
-              <a:buNone/>
-            </a:pPr>
-            <a:r>
-              <a:rPr lang="en-US" sz="900" dirty="0">
-                <a:solidFill>
-                  <a:srgbClr val="64748B"/>
-                </a:solidFill>
-                <a:latin typeface="Arial" pitchFamily="34" charset="0"/>
-                <a:ea typeface="Arial" pitchFamily="34" charset="-122"/>
-                <a:cs typeface="Arial" pitchFamily="34" charset="-120"/>
-              </a:rPr>
-              <a:t>楽天 3.53/5 (7.06) / じゃらん 3.43/5 (6.86)</a:t>
-            </a:r>
-            <a:endParaRPr lang="en-US" sz="1100" dirty="0"/>
-          </a:p>
-          <a:p>
-            <a:pPr indent="0" marL="0">
-              <a:spcAft>
-                <a:spcPts val="200"/>
-              </a:spcAft>
-              <a:buNone/>
-            </a:pPr>
-            <a:r>
-              <a:rPr lang="en-US" sz="900" dirty="0">
-                <a:solidFill>
-                  <a:srgbClr val="64748B"/>
-                </a:solidFill>
-                <a:latin typeface="Arial" pitchFamily="34" charset="0"/>
-                <a:ea typeface="Arial" pitchFamily="34" charset="-122"/>
-                <a:cs typeface="Arial" pitchFamily="34" charset="-120"/>
-              </a:rPr>
-              <a:t>Google 3.08/5 (6.17) が最優先課題</a:t>
+              <a:t>Google（6.17点）・じゃらん（6.86点）が全体スコアを引き下げ</a:t>
             </a:r>
             <a:endParaRPr lang="en-US" sz="1100" dirty="0"/>
           </a:p>
@@ -4731,7 +4691,7 @@
                 <a:ea typeface="Arial" pitchFamily="34" charset="-122"/>
                 <a:cs typeface="Arial" pitchFamily="34" charset="-120"/>
               </a:rPr>
-              <a:t>チャートは全て10pt換算で表示</a:t>
+              <a:t>国内サイト（5点満点）は10点換算で比較</a:t>
             </a:r>
             <a:endParaRPr lang="en-US" sz="1100" dirty="0"/>
           </a:p>
@@ -4752,7 +4712,7 @@
           </p:nvPr>
         </p:nvGraphicFramePr>
         <p:xfrm>
-          <a:off x="457200" y="4251960"/>
+          <a:off x="457200" y="4297680"/>
           <a:ext cx="8229600" cy="91440"/>
         </p:xfrm>
         <a:graphic>
@@ -4761,10 +4721,10 @@
               <a:tblPr/>
               <a:tblGrid>
                 <a:gridCol w="1828800"/>
-                <a:gridCol w="1097280"/>
-                <a:gridCol w="1645920"/>
-                <a:gridCol w="1097280"/>
-                <a:gridCol w="1645920"/>
+                <a:gridCol w="914400"/>
+                <a:gridCol w="1828800"/>
+                <a:gridCol w="914400"/>
+                <a:gridCol w="2743200"/>
               </a:tblGrid>
               <a:tr h="228600">
                 <a:tc>
@@ -4920,7 +4880,7 @@
                           <a:ea typeface="Arial" pitchFamily="34" charset="-122"/>
                           <a:cs typeface="Arial" pitchFamily="34" charset="-120"/>
                         </a:rPr>
-                        <a:t>平均(native)</a:t>
+                        <a:t>ネイティブ平均</a:t>
                       </a:r>
                       <a:endParaRPr lang="en-US" sz="900" dirty="0">
                         <a:latin typeface="Arial" charset="0"/>
@@ -7704,7 +7664,7 @@
                 <a:ea typeface="Arial" pitchFamily="34" charset="-122"/>
                 <a:cs typeface="Arial" pitchFamily="34" charset="-120"/>
               </a:rPr>
-              <a:t>16件</a:t>
+              <a:t>18件</a:t>
             </a:r>
             <a:endParaRPr lang="en-US" sz="900" dirty="0"/>
           </a:p>
@@ -7782,7 +7742,7 @@
                 <a:ea typeface="Arial" pitchFamily="34" charset="-122"/>
                 <a:cs typeface="Arial" pitchFamily="34" charset="-120"/>
               </a:rPr>
-              <a:t>浜松町駅・大門駅から徒歩圏内、羽田直結</a:t>
+              <a:t>複数路線・複数駅へのアクセスでお台場・東京駅・羽田へ便利</a:t>
             </a:r>
             <a:endParaRPr lang="en-US" sz="900" dirty="0"/>
           </a:p>
@@ -7821,7 +7781,7 @@
                 <a:ea typeface="Arial" pitchFamily="34" charset="-122"/>
                 <a:cs typeface="Arial" pitchFamily="34" charset="-120"/>
               </a:rPr>
-              <a:t>浜松町から近くて便利、出張に最適な立地</a:t>
+              <a:t>「浜松町・日の出両駅から近く東京駅にも乗り換えなしで行けた」</a:t>
             </a:r>
             <a:endParaRPr lang="en-US" sz="900" dirty="0"/>
           </a:p>
@@ -7927,7 +7887,7 @@
                 <a:ea typeface="Arial" pitchFamily="34" charset="-122"/>
                 <a:cs typeface="Arial" pitchFamily="34" charset="-120"/>
               </a:rPr>
-              <a:t>12件</a:t>
+              <a:t>6件</a:t>
             </a:r>
             <a:endParaRPr lang="en-US" sz="900" dirty="0"/>
           </a:p>
@@ -7942,229 +7902,6 @@
         <p:spPr>
           <a:xfrm>
             <a:off x="3429000" y="1124712"/>
-            <a:ext cx="1645920" cy="274320"/>
-          </a:xfrm>
-          <a:prstGeom prst="rect">
-            <a:avLst/>
-          </a:prstGeom>
-          <a:noFill/>
-          <a:ln/>
-        </p:spPr>
-        <p:txBody>
-          <a:bodyPr wrap="square" lIns="0" tIns="0" rIns="0" bIns="0" rtlCol="0" anchor="ctr"/>
-          <a:lstStyle/>
-          <a:p>
-            <a:pPr indent="0" marL="0">
-              <a:buNone/>
-            </a:pPr>
-            <a:r>
-              <a:rPr lang="en-US" sz="1300" b="1" dirty="0">
-                <a:solidFill>
-                  <a:srgbClr val="1A2744"/>
-                </a:solidFill>
-                <a:latin typeface="Arial" pitchFamily="34" charset="0"/>
-                <a:ea typeface="Arial" pitchFamily="34" charset="-122"/>
-                <a:cs typeface="Arial" pitchFamily="34" charset="-120"/>
-              </a:rPr>
-              <a:t>コストパフォーマンス</a:t>
-            </a:r>
-            <a:endParaRPr lang="en-US" sz="1300" dirty="0"/>
-          </a:p>
-        </p:txBody>
-      </p:sp>
-      <p:sp>
-        <p:nvSpPr>
-          <p:cNvPr id="17" name="Text 15"/>
-          <p:cNvSpPr/>
-          <p:nvPr/>
-        </p:nvSpPr>
-        <p:spPr>
-          <a:xfrm>
-            <a:off x="3429000" y="1417320"/>
-            <a:ext cx="2377440" cy="365760"/>
-          </a:xfrm>
-          <a:prstGeom prst="rect">
-            <a:avLst/>
-          </a:prstGeom>
-          <a:noFill/>
-          <a:ln/>
-        </p:spPr>
-        <p:txBody>
-          <a:bodyPr wrap="square" lIns="0" tIns="0" rIns="0" bIns="0" rtlCol="0" anchor="ctr"/>
-          <a:lstStyle/>
-          <a:p>
-            <a:pPr indent="0" marL="0">
-              <a:buNone/>
-            </a:pPr>
-            <a:r>
-              <a:rPr lang="en-US" sz="900" dirty="0">
-                <a:solidFill>
-                  <a:srgbClr val="64748B"/>
-                </a:solidFill>
-                <a:latin typeface="Arial" pitchFamily="34" charset="0"/>
-                <a:ea typeface="Arial" pitchFamily="34" charset="-122"/>
-                <a:cs typeface="Arial" pitchFamily="34" charset="-120"/>
-              </a:rPr>
-              <a:t>リーズナブルな料金設定、価格相応</a:t>
-            </a:r>
-            <a:endParaRPr lang="en-US" sz="900" dirty="0"/>
-          </a:p>
-        </p:txBody>
-      </p:sp>
-      <p:sp>
-        <p:nvSpPr>
-          <p:cNvPr id="18" name="Text 16"/>
-          <p:cNvSpPr/>
-          <p:nvPr/>
-        </p:nvSpPr>
-        <p:spPr>
-          <a:xfrm>
-            <a:off x="3429000" y="1828800"/>
-            <a:ext cx="2377440" cy="640080"/>
-          </a:xfrm>
-          <a:prstGeom prst="rect">
-            <a:avLst/>
-          </a:prstGeom>
-          <a:noFill/>
-          <a:ln/>
-        </p:spPr>
-        <p:txBody>
-          <a:bodyPr wrap="square" lIns="0" tIns="0" rIns="0" bIns="0" rtlCol="0" anchor="ctr"/>
-          <a:lstStyle/>
-          <a:p>
-            <a:pPr indent="0" marL="0">
-              <a:buNone/>
-            </a:pPr>
-            <a:r>
-              <a:rPr lang="en-US" sz="900" i="1" dirty="0">
-                <a:solidFill>
-                  <a:srgbClr val="3B7DD8"/>
-                </a:solidFill>
-                <a:latin typeface="Arial" pitchFamily="34" charset="0"/>
-                <a:ea typeface="Arial" pitchFamily="34" charset="-122"/>
-                <a:cs typeface="Arial" pitchFamily="34" charset="-120"/>
-              </a:rPr>
-              <a:t>この値段で立地が良いので満足</a:t>
-            </a:r>
-            <a:endParaRPr lang="en-US" sz="900" dirty="0"/>
-          </a:p>
-        </p:txBody>
-      </p:sp>
-      <p:sp>
-        <p:nvSpPr>
-          <p:cNvPr id="19" name="Shape 17"/>
-          <p:cNvSpPr/>
-          <p:nvPr/>
-        </p:nvSpPr>
-        <p:spPr>
-          <a:xfrm>
-            <a:off x="6126480" y="1051560"/>
-            <a:ext cx="2651760" cy="1600200"/>
-          </a:xfrm>
-          <a:prstGeom prst="rect">
-            <a:avLst/>
-          </a:prstGeom>
-          <a:solidFill>
-            <a:srgbClr val="FFFFFF"/>
-          </a:solidFill>
-          <a:ln/>
-          <a:effectLst>
-            <a:outerShdw sx="100000" sy="100000" kx="0" ky="0" algn="bl" rotWithShape="0" blurRad="50800" dist="25400" dir="8100000">
-              <a:srgbClr val="000000">
-                <a:alpha val="10000"/>
-              </a:srgbClr>
-            </a:outerShdw>
-          </a:effectLst>
-        </p:spPr>
-      </p:sp>
-      <p:sp>
-        <p:nvSpPr>
-          <p:cNvPr id="20" name="Shape 18"/>
-          <p:cNvSpPr/>
-          <p:nvPr/>
-        </p:nvSpPr>
-        <p:spPr>
-          <a:xfrm>
-            <a:off x="6126480" y="1051560"/>
-            <a:ext cx="54864" cy="1600200"/>
-          </a:xfrm>
-          <a:prstGeom prst="rect">
-            <a:avLst/>
-          </a:prstGeom>
-          <a:solidFill>
-            <a:srgbClr val="16A34A"/>
-          </a:solidFill>
-          <a:ln/>
-        </p:spPr>
-      </p:sp>
-      <p:sp>
-        <p:nvSpPr>
-          <p:cNvPr id="21" name="Shape 19"/>
-          <p:cNvSpPr/>
-          <p:nvPr/>
-        </p:nvSpPr>
-        <p:spPr>
-          <a:xfrm>
-            <a:off x="7955280" y="1124712"/>
-            <a:ext cx="658368" cy="228600"/>
-          </a:xfrm>
-          <a:prstGeom prst="rect">
-            <a:avLst/>
-          </a:prstGeom>
-          <a:solidFill>
-            <a:srgbClr val="DCFCE7"/>
-          </a:solidFill>
-          <a:ln/>
-        </p:spPr>
-      </p:sp>
-      <p:sp>
-        <p:nvSpPr>
-          <p:cNvPr id="22" name="Text 20"/>
-          <p:cNvSpPr/>
-          <p:nvPr/>
-        </p:nvSpPr>
-        <p:spPr>
-          <a:xfrm>
-            <a:off x="7955280" y="1124712"/>
-            <a:ext cx="658368" cy="228600"/>
-          </a:xfrm>
-          <a:prstGeom prst="rect">
-            <a:avLst/>
-          </a:prstGeom>
-          <a:noFill/>
-          <a:ln/>
-        </p:spPr>
-        <p:txBody>
-          <a:bodyPr wrap="square" lIns="0" tIns="0" rIns="0" bIns="0" rtlCol="0" anchor="ctr"/>
-          <a:lstStyle/>
-          <a:p>
-            <a:pPr algn="ctr" indent="0" marL="0">
-              <a:buNone/>
-            </a:pPr>
-            <a:r>
-              <a:rPr lang="en-US" sz="900" b="1" dirty="0">
-                <a:solidFill>
-                  <a:srgbClr val="16A34A"/>
-                </a:solidFill>
-                <a:latin typeface="Arial" pitchFamily="34" charset="0"/>
-                <a:ea typeface="Arial" pitchFamily="34" charset="-122"/>
-                <a:cs typeface="Arial" pitchFamily="34" charset="-120"/>
-              </a:rPr>
-              <a:t>10件</a:t>
-            </a:r>
-            <a:endParaRPr lang="en-US" sz="900" dirty="0"/>
-          </a:p>
-        </p:txBody>
-      </p:sp>
-      <p:sp>
-        <p:nvSpPr>
-          <p:cNvPr id="23" name="Text 21"/>
-          <p:cNvSpPr/>
-          <p:nvPr/>
-        </p:nvSpPr>
-        <p:spPr>
-          <a:xfrm>
-            <a:off x="6263640" y="1124712"/>
             <a:ext cx="1645920" cy="274320"/>
           </a:xfrm>
           <a:prstGeom prst="rect">
@@ -8197,13 +7934,13 @@
       </p:sp>
       <p:sp>
         <p:nvSpPr>
-          <p:cNvPr id="24" name="Text 22"/>
-          <p:cNvSpPr/>
-          <p:nvPr/>
-        </p:nvSpPr>
-        <p:spPr>
-          <a:xfrm>
-            <a:off x="6263640" y="1417320"/>
+          <p:cNvPr id="17" name="Text 15"/>
+          <p:cNvSpPr/>
+          <p:nvPr/>
+        </p:nvSpPr>
+        <p:spPr>
+          <a:xfrm>
+            <a:off x="3429000" y="1417320"/>
             <a:ext cx="2377440" cy="365760"/>
           </a:xfrm>
           <a:prstGeom prst="rect">
@@ -8228,7 +7965,7 @@
                 <a:ea typeface="Arial" pitchFamily="34" charset="-122"/>
                 <a:cs typeface="Arial" pitchFamily="34" charset="-120"/>
               </a:rPr>
-              <a:t>清掃が行き届いている、きれいな部屋</a:t>
+              <a:t>老朽化した設備ながら清掃は行き届いており清潔感を維持</a:t>
             </a:r>
             <a:endParaRPr lang="en-US" sz="900" dirty="0"/>
           </a:p>
@@ -8236,13 +7973,13 @@
       </p:sp>
       <p:sp>
         <p:nvSpPr>
-          <p:cNvPr id="25" name="Text 23"/>
-          <p:cNvSpPr/>
-          <p:nvPr/>
-        </p:nvSpPr>
-        <p:spPr>
-          <a:xfrm>
-            <a:off x="6263640" y="1828800"/>
+          <p:cNvPr id="18" name="Text 16"/>
+          <p:cNvSpPr/>
+          <p:nvPr/>
+        </p:nvSpPr>
+        <p:spPr>
+          <a:xfrm>
+            <a:off x="3429000" y="1828800"/>
             <a:ext cx="2377440" cy="640080"/>
           </a:xfrm>
           <a:prstGeom prst="rect">
@@ -8267,7 +8004,7 @@
                 <a:ea typeface="Arial" pitchFamily="34" charset="-122"/>
                 <a:cs typeface="Arial" pitchFamily="34" charset="-120"/>
               </a:rPr>
-              <a:t>部屋がきれいで気持ちよく過ごせた</a:t>
+              <a:t>「部屋も設備に古さを感じるものの、綺麗にされており良かった」</a:t>
             </a:r>
             <a:endParaRPr lang="en-US" sz="900" dirty="0"/>
           </a:p>
@@ -8275,13 +8012,13 @@
       </p:sp>
       <p:sp>
         <p:nvSpPr>
-          <p:cNvPr id="26" name="Shape 24"/>
-          <p:cNvSpPr/>
-          <p:nvPr/>
-        </p:nvSpPr>
-        <p:spPr>
-          <a:xfrm>
-            <a:off x="457200" y="2880360"/>
+          <p:cNvPr id="19" name="Shape 17"/>
+          <p:cNvSpPr/>
+          <p:nvPr/>
+        </p:nvSpPr>
+        <p:spPr>
+          <a:xfrm>
+            <a:off x="6126480" y="1051560"/>
             <a:ext cx="2651760" cy="1600200"/>
           </a:xfrm>
           <a:prstGeom prst="rect">
@@ -8302,13 +8039,13 @@
       </p:sp>
       <p:sp>
         <p:nvSpPr>
-          <p:cNvPr id="27" name="Shape 25"/>
-          <p:cNvSpPr/>
-          <p:nvPr/>
-        </p:nvSpPr>
-        <p:spPr>
-          <a:xfrm>
-            <a:off x="457200" y="2880360"/>
+          <p:cNvPr id="20" name="Shape 18"/>
+          <p:cNvSpPr/>
+          <p:nvPr/>
+        </p:nvSpPr>
+        <p:spPr>
+          <a:xfrm>
+            <a:off x="6126480" y="1051560"/>
             <a:ext cx="54864" cy="1600200"/>
           </a:xfrm>
           <a:prstGeom prst="rect">
@@ -8322,13 +8059,13 @@
       </p:sp>
       <p:sp>
         <p:nvSpPr>
-          <p:cNvPr id="28" name="Shape 26"/>
-          <p:cNvSpPr/>
-          <p:nvPr/>
-        </p:nvSpPr>
-        <p:spPr>
-          <a:xfrm>
-            <a:off x="2286000" y="2953512"/>
+          <p:cNvPr id="21" name="Shape 19"/>
+          <p:cNvSpPr/>
+          <p:nvPr/>
+        </p:nvSpPr>
+        <p:spPr>
+          <a:xfrm>
+            <a:off x="7955280" y="1124712"/>
             <a:ext cx="658368" cy="228600"/>
           </a:xfrm>
           <a:prstGeom prst="rect">
@@ -8342,6 +8079,229 @@
       </p:sp>
       <p:sp>
         <p:nvSpPr>
+          <p:cNvPr id="22" name="Text 20"/>
+          <p:cNvSpPr/>
+          <p:nvPr/>
+        </p:nvSpPr>
+        <p:spPr>
+          <a:xfrm>
+            <a:off x="7955280" y="1124712"/>
+            <a:ext cx="658368" cy="228600"/>
+          </a:xfrm>
+          <a:prstGeom prst="rect">
+            <a:avLst/>
+          </a:prstGeom>
+          <a:noFill/>
+          <a:ln/>
+        </p:spPr>
+        <p:txBody>
+          <a:bodyPr wrap="square" lIns="0" tIns="0" rIns="0" bIns="0" rtlCol="0" anchor="ctr"/>
+          <a:lstStyle/>
+          <a:p>
+            <a:pPr algn="ctr" indent="0" marL="0">
+              <a:buNone/>
+            </a:pPr>
+            <a:r>
+              <a:rPr lang="en-US" sz="900" b="1" dirty="0">
+                <a:solidFill>
+                  <a:srgbClr val="16A34A"/>
+                </a:solidFill>
+                <a:latin typeface="Arial" pitchFamily="34" charset="0"/>
+                <a:ea typeface="Arial" pitchFamily="34" charset="-122"/>
+                <a:cs typeface="Arial" pitchFamily="34" charset="-120"/>
+              </a:rPr>
+              <a:t>7件</a:t>
+            </a:r>
+            <a:endParaRPr lang="en-US" sz="900" dirty="0"/>
+          </a:p>
+        </p:txBody>
+      </p:sp>
+      <p:sp>
+        <p:nvSpPr>
+          <p:cNvPr id="23" name="Text 21"/>
+          <p:cNvSpPr/>
+          <p:nvPr/>
+        </p:nvSpPr>
+        <p:spPr>
+          <a:xfrm>
+            <a:off x="6263640" y="1124712"/>
+            <a:ext cx="1645920" cy="274320"/>
+          </a:xfrm>
+          <a:prstGeom prst="rect">
+            <a:avLst/>
+          </a:prstGeom>
+          <a:noFill/>
+          <a:ln/>
+        </p:spPr>
+        <p:txBody>
+          <a:bodyPr wrap="square" lIns="0" tIns="0" rIns="0" bIns="0" rtlCol="0" anchor="ctr"/>
+          <a:lstStyle/>
+          <a:p>
+            <a:pPr indent="0" marL="0">
+              <a:buNone/>
+            </a:pPr>
+            <a:r>
+              <a:rPr lang="en-US" sz="1300" b="1" dirty="0">
+                <a:solidFill>
+                  <a:srgbClr val="1A2744"/>
+                </a:solidFill>
+                <a:latin typeface="Arial" pitchFamily="34" charset="0"/>
+                <a:ea typeface="Arial" pitchFamily="34" charset="-122"/>
+                <a:cs typeface="Arial" pitchFamily="34" charset="-120"/>
+              </a:rPr>
+              <a:t>スタッフ対応</a:t>
+            </a:r>
+            <a:endParaRPr lang="en-US" sz="1300" dirty="0"/>
+          </a:p>
+        </p:txBody>
+      </p:sp>
+      <p:sp>
+        <p:nvSpPr>
+          <p:cNvPr id="24" name="Text 22"/>
+          <p:cNvSpPr/>
+          <p:nvPr/>
+        </p:nvSpPr>
+        <p:spPr>
+          <a:xfrm>
+            <a:off x="6263640" y="1417320"/>
+            <a:ext cx="2377440" cy="365760"/>
+          </a:xfrm>
+          <a:prstGeom prst="rect">
+            <a:avLst/>
+          </a:prstGeom>
+          <a:noFill/>
+          <a:ln/>
+        </p:spPr>
+        <p:txBody>
+          <a:bodyPr wrap="square" lIns="0" tIns="0" rIns="0" bIns="0" rtlCol="0" anchor="ctr"/>
+          <a:lstStyle/>
+          <a:p>
+            <a:pPr indent="0" marL="0">
+              <a:buNone/>
+            </a:pPr>
+            <a:r>
+              <a:rPr lang="en-US" sz="900" dirty="0">
+                <a:solidFill>
+                  <a:srgbClr val="64748B"/>
+                </a:solidFill>
+                <a:latin typeface="Arial" pitchFamily="34" charset="0"/>
+                <a:ea typeface="Arial" pitchFamily="34" charset="-122"/>
+                <a:cs typeface="Arial" pitchFamily="34" charset="-120"/>
+              </a:rPr>
+              <a:t>チェックイン時間の柔軟な対応など親切な接客が評価される</a:t>
+            </a:r>
+            <a:endParaRPr lang="en-US" sz="900" dirty="0"/>
+          </a:p>
+        </p:txBody>
+      </p:sp>
+      <p:sp>
+        <p:nvSpPr>
+          <p:cNvPr id="25" name="Text 23"/>
+          <p:cNvSpPr/>
+          <p:nvPr/>
+        </p:nvSpPr>
+        <p:spPr>
+          <a:xfrm>
+            <a:off x="6263640" y="1828800"/>
+            <a:ext cx="2377440" cy="640080"/>
+          </a:xfrm>
+          <a:prstGeom prst="rect">
+            <a:avLst/>
+          </a:prstGeom>
+          <a:noFill/>
+          <a:ln/>
+        </p:spPr>
+        <p:txBody>
+          <a:bodyPr wrap="square" lIns="0" tIns="0" rIns="0" bIns="0" rtlCol="0" anchor="ctr"/>
+          <a:lstStyle/>
+          <a:p>
+            <a:pPr indent="0" marL="0">
+              <a:buNone/>
+            </a:pPr>
+            <a:r>
+              <a:rPr lang="en-US" sz="900" i="1" dirty="0">
+                <a:solidFill>
+                  <a:srgbClr val="3B7DD8"/>
+                </a:solidFill>
+                <a:latin typeface="Arial" pitchFamily="34" charset="0"/>
+                <a:ea typeface="Arial" pitchFamily="34" charset="-122"/>
+                <a:cs typeface="Arial" pitchFamily="34" charset="-120"/>
+              </a:rPr>
+              <a:t>「15時チェックインでしたが柔軟に対応いただけて助かりました」</a:t>
+            </a:r>
+            <a:endParaRPr lang="en-US" sz="900" dirty="0"/>
+          </a:p>
+        </p:txBody>
+      </p:sp>
+      <p:sp>
+        <p:nvSpPr>
+          <p:cNvPr id="26" name="Shape 24"/>
+          <p:cNvSpPr/>
+          <p:nvPr/>
+        </p:nvSpPr>
+        <p:spPr>
+          <a:xfrm>
+            <a:off x="457200" y="2880360"/>
+            <a:ext cx="2651760" cy="1600200"/>
+          </a:xfrm>
+          <a:prstGeom prst="rect">
+            <a:avLst/>
+          </a:prstGeom>
+          <a:solidFill>
+            <a:srgbClr val="FFFFFF"/>
+          </a:solidFill>
+          <a:ln/>
+          <a:effectLst>
+            <a:outerShdw sx="100000" sy="100000" kx="0" ky="0" algn="bl" rotWithShape="0" blurRad="50800" dist="25400" dir="8100000">
+              <a:srgbClr val="000000">
+                <a:alpha val="10000"/>
+              </a:srgbClr>
+            </a:outerShdw>
+          </a:effectLst>
+        </p:spPr>
+      </p:sp>
+      <p:sp>
+        <p:nvSpPr>
+          <p:cNvPr id="27" name="Shape 25"/>
+          <p:cNvSpPr/>
+          <p:nvPr/>
+        </p:nvSpPr>
+        <p:spPr>
+          <a:xfrm>
+            <a:off x="457200" y="2880360"/>
+            <a:ext cx="54864" cy="1600200"/>
+          </a:xfrm>
+          <a:prstGeom prst="rect">
+            <a:avLst/>
+          </a:prstGeom>
+          <a:solidFill>
+            <a:srgbClr val="16A34A"/>
+          </a:solidFill>
+          <a:ln/>
+        </p:spPr>
+      </p:sp>
+      <p:sp>
+        <p:nvSpPr>
+          <p:cNvPr id="28" name="Shape 26"/>
+          <p:cNvSpPr/>
+          <p:nvPr/>
+        </p:nvSpPr>
+        <p:spPr>
+          <a:xfrm>
+            <a:off x="2286000" y="2953512"/>
+            <a:ext cx="658368" cy="228600"/>
+          </a:xfrm>
+          <a:prstGeom prst="rect">
+            <a:avLst/>
+          </a:prstGeom>
+          <a:solidFill>
+            <a:srgbClr val="DCFCE7"/>
+          </a:solidFill>
+          <a:ln/>
+        </p:spPr>
+      </p:sp>
+      <p:sp>
+        <p:nvSpPr>
           <p:cNvPr id="29" name="Text 27"/>
           <p:cNvSpPr/>
           <p:nvPr/>
@@ -8349,6 +8309,452 @@
         <p:spPr>
           <a:xfrm>
             <a:off x="2286000" y="2953512"/>
+            <a:ext cx="658368" cy="228600"/>
+          </a:xfrm>
+          <a:prstGeom prst="rect">
+            <a:avLst/>
+          </a:prstGeom>
+          <a:noFill/>
+          <a:ln/>
+        </p:spPr>
+        <p:txBody>
+          <a:bodyPr wrap="square" lIns="0" tIns="0" rIns="0" bIns="0" rtlCol="0" anchor="ctr"/>
+          <a:lstStyle/>
+          <a:p>
+            <a:pPr algn="ctr" indent="0" marL="0">
+              <a:buNone/>
+            </a:pPr>
+            <a:r>
+              <a:rPr lang="en-US" sz="900" b="1" dirty="0">
+                <a:solidFill>
+                  <a:srgbClr val="16A34A"/>
+                </a:solidFill>
+                <a:latin typeface="Arial" pitchFamily="34" charset="0"/>
+                <a:ea typeface="Arial" pitchFamily="34" charset="-122"/>
+                <a:cs typeface="Arial" pitchFamily="34" charset="-120"/>
+              </a:rPr>
+              <a:t>22件</a:t>
+            </a:r>
+            <a:endParaRPr lang="en-US" sz="900" dirty="0"/>
+          </a:p>
+        </p:txBody>
+      </p:sp>
+      <p:sp>
+        <p:nvSpPr>
+          <p:cNvPr id="30" name="Text 28"/>
+          <p:cNvSpPr/>
+          <p:nvPr/>
+        </p:nvSpPr>
+        <p:spPr>
+          <a:xfrm>
+            <a:off x="594360" y="2953512"/>
+            <a:ext cx="1645920" cy="274320"/>
+          </a:xfrm>
+          <a:prstGeom prst="rect">
+            <a:avLst/>
+          </a:prstGeom>
+          <a:noFill/>
+          <a:ln/>
+        </p:spPr>
+        <p:txBody>
+          <a:bodyPr wrap="square" lIns="0" tIns="0" rIns="0" bIns="0" rtlCol="0" anchor="ctr"/>
+          <a:lstStyle/>
+          <a:p>
+            <a:pPr indent="0" marL="0">
+              <a:buNone/>
+            </a:pPr>
+            <a:r>
+              <a:rPr lang="en-US" sz="1300" b="1" dirty="0">
+                <a:solidFill>
+                  <a:srgbClr val="1A2744"/>
+                </a:solidFill>
+                <a:latin typeface="Arial" pitchFamily="34" charset="0"/>
+                <a:ea typeface="Arial" pitchFamily="34" charset="-122"/>
+                <a:cs typeface="Arial" pitchFamily="34" charset="-120"/>
+              </a:rPr>
+              <a:t>客室・設備</a:t>
+            </a:r>
+            <a:endParaRPr lang="en-US" sz="1300" dirty="0"/>
+          </a:p>
+        </p:txBody>
+      </p:sp>
+      <p:sp>
+        <p:nvSpPr>
+          <p:cNvPr id="31" name="Text 29"/>
+          <p:cNvSpPr/>
+          <p:nvPr/>
+        </p:nvSpPr>
+        <p:spPr>
+          <a:xfrm>
+            <a:off x="594360" y="3246120"/>
+            <a:ext cx="2377440" cy="365760"/>
+          </a:xfrm>
+          <a:prstGeom prst="rect">
+            <a:avLst/>
+          </a:prstGeom>
+          <a:noFill/>
+          <a:ln/>
+        </p:spPr>
+        <p:txBody>
+          <a:bodyPr wrap="square" lIns="0" tIns="0" rIns="0" bIns="0" rtlCol="0" anchor="ctr"/>
+          <a:lstStyle/>
+          <a:p>
+            <a:pPr indent="0" marL="0">
+              <a:buNone/>
+            </a:pPr>
+            <a:r>
+              <a:rPr lang="en-US" sz="900" dirty="0">
+                <a:solidFill>
+                  <a:srgbClr val="64748B"/>
+                </a:solidFill>
+                <a:latin typeface="Arial" pitchFamily="34" charset="0"/>
+                <a:ea typeface="Arial" pitchFamily="34" charset="-122"/>
+                <a:cs typeface="Arial" pitchFamily="34" charset="-120"/>
+              </a:rPr>
+              <a:t>シャワー水圧・無料ランドリーなど基本機能は十分な評価</a:t>
+            </a:r>
+            <a:endParaRPr lang="en-US" sz="900" dirty="0"/>
+          </a:p>
+        </p:txBody>
+      </p:sp>
+      <p:sp>
+        <p:nvSpPr>
+          <p:cNvPr id="32" name="Text 30"/>
+          <p:cNvSpPr/>
+          <p:nvPr/>
+        </p:nvSpPr>
+        <p:spPr>
+          <a:xfrm>
+            <a:off x="594360" y="3657600"/>
+            <a:ext cx="2377440" cy="640080"/>
+          </a:xfrm>
+          <a:prstGeom prst="rect">
+            <a:avLst/>
+          </a:prstGeom>
+          <a:noFill/>
+          <a:ln/>
+        </p:spPr>
+        <p:txBody>
+          <a:bodyPr wrap="square" lIns="0" tIns="0" rIns="0" bIns="0" rtlCol="0" anchor="ctr"/>
+          <a:lstStyle/>
+          <a:p>
+            <a:pPr indent="0" marL="0">
+              <a:buNone/>
+            </a:pPr>
+            <a:r>
+              <a:rPr lang="en-US" sz="900" i="1" dirty="0">
+                <a:solidFill>
+                  <a:srgbClr val="3B7DD8"/>
+                </a:solidFill>
+                <a:latin typeface="Arial" pitchFamily="34" charset="0"/>
+                <a:ea typeface="Arial" pitchFamily="34" charset="-122"/>
+                <a:cs typeface="Arial" pitchFamily="34" charset="-120"/>
+              </a:rPr>
+              <a:t>「水量やシャワーもしっかり出て困りません」</a:t>
+            </a:r>
+            <a:endParaRPr lang="en-US" sz="900" dirty="0"/>
+          </a:p>
+        </p:txBody>
+      </p:sp>
+      <p:sp>
+        <p:nvSpPr>
+          <p:cNvPr id="33" name="Shape 31"/>
+          <p:cNvSpPr/>
+          <p:nvPr/>
+        </p:nvSpPr>
+        <p:spPr>
+          <a:xfrm>
+            <a:off x="3291840" y="2880360"/>
+            <a:ext cx="2651760" cy="1600200"/>
+          </a:xfrm>
+          <a:prstGeom prst="rect">
+            <a:avLst/>
+          </a:prstGeom>
+          <a:solidFill>
+            <a:srgbClr val="FFFFFF"/>
+          </a:solidFill>
+          <a:ln/>
+          <a:effectLst>
+            <a:outerShdw sx="100000" sy="100000" kx="0" ky="0" algn="bl" rotWithShape="0" blurRad="50800" dist="25400" dir="8100000">
+              <a:srgbClr val="000000">
+                <a:alpha val="10000"/>
+              </a:srgbClr>
+            </a:outerShdw>
+          </a:effectLst>
+        </p:spPr>
+      </p:sp>
+      <p:sp>
+        <p:nvSpPr>
+          <p:cNvPr id="34" name="Shape 32"/>
+          <p:cNvSpPr/>
+          <p:nvPr/>
+        </p:nvSpPr>
+        <p:spPr>
+          <a:xfrm>
+            <a:off x="3291840" y="2880360"/>
+            <a:ext cx="54864" cy="1600200"/>
+          </a:xfrm>
+          <a:prstGeom prst="rect">
+            <a:avLst/>
+          </a:prstGeom>
+          <a:solidFill>
+            <a:srgbClr val="16A34A"/>
+          </a:solidFill>
+          <a:ln/>
+        </p:spPr>
+      </p:sp>
+      <p:sp>
+        <p:nvSpPr>
+          <p:cNvPr id="35" name="Shape 33"/>
+          <p:cNvSpPr/>
+          <p:nvPr/>
+        </p:nvSpPr>
+        <p:spPr>
+          <a:xfrm>
+            <a:off x="5120640" y="2953512"/>
+            <a:ext cx="658368" cy="228600"/>
+          </a:xfrm>
+          <a:prstGeom prst="rect">
+            <a:avLst/>
+          </a:prstGeom>
+          <a:solidFill>
+            <a:srgbClr val="DCFCE7"/>
+          </a:solidFill>
+          <a:ln/>
+        </p:spPr>
+      </p:sp>
+      <p:sp>
+        <p:nvSpPr>
+          <p:cNvPr id="36" name="Text 34"/>
+          <p:cNvSpPr/>
+          <p:nvPr/>
+        </p:nvSpPr>
+        <p:spPr>
+          <a:xfrm>
+            <a:off x="5120640" y="2953512"/>
+            <a:ext cx="658368" cy="228600"/>
+          </a:xfrm>
+          <a:prstGeom prst="rect">
+            <a:avLst/>
+          </a:prstGeom>
+          <a:noFill/>
+          <a:ln/>
+        </p:spPr>
+        <p:txBody>
+          <a:bodyPr wrap="square" lIns="0" tIns="0" rIns="0" bIns="0" rtlCol="0" anchor="ctr"/>
+          <a:lstStyle/>
+          <a:p>
+            <a:pPr algn="ctr" indent="0" marL="0">
+              <a:buNone/>
+            </a:pPr>
+            <a:r>
+              <a:rPr lang="en-US" sz="900" b="1" dirty="0">
+                <a:solidFill>
+                  <a:srgbClr val="16A34A"/>
+                </a:solidFill>
+                <a:latin typeface="Arial" pitchFamily="34" charset="0"/>
+                <a:ea typeface="Arial" pitchFamily="34" charset="-122"/>
+                <a:cs typeface="Arial" pitchFamily="34" charset="-120"/>
+              </a:rPr>
+              <a:t>7件</a:t>
+            </a:r>
+            <a:endParaRPr lang="en-US" sz="900" dirty="0"/>
+          </a:p>
+        </p:txBody>
+      </p:sp>
+      <p:sp>
+        <p:nvSpPr>
+          <p:cNvPr id="37" name="Text 35"/>
+          <p:cNvSpPr/>
+          <p:nvPr/>
+        </p:nvSpPr>
+        <p:spPr>
+          <a:xfrm>
+            <a:off x="3429000" y="2953512"/>
+            <a:ext cx="1645920" cy="274320"/>
+          </a:xfrm>
+          <a:prstGeom prst="rect">
+            <a:avLst/>
+          </a:prstGeom>
+          <a:noFill/>
+          <a:ln/>
+        </p:spPr>
+        <p:txBody>
+          <a:bodyPr wrap="square" lIns="0" tIns="0" rIns="0" bIns="0" rtlCol="0" anchor="ctr"/>
+          <a:lstStyle/>
+          <a:p>
+            <a:pPr indent="0" marL="0">
+              <a:buNone/>
+            </a:pPr>
+            <a:r>
+              <a:rPr lang="en-US" sz="1300" b="1" dirty="0">
+                <a:solidFill>
+                  <a:srgbClr val="1A2744"/>
+                </a:solidFill>
+                <a:latin typeface="Arial" pitchFamily="34" charset="0"/>
+                <a:ea typeface="Arial" pitchFamily="34" charset="-122"/>
+                <a:cs typeface="Arial" pitchFamily="34" charset="-120"/>
+              </a:rPr>
+              <a:t>朝食</a:t>
+            </a:r>
+            <a:endParaRPr lang="en-US" sz="1300" dirty="0"/>
+          </a:p>
+        </p:txBody>
+      </p:sp>
+      <p:sp>
+        <p:nvSpPr>
+          <p:cNvPr id="38" name="Text 36"/>
+          <p:cNvSpPr/>
+          <p:nvPr/>
+        </p:nvSpPr>
+        <p:spPr>
+          <a:xfrm>
+            <a:off x="3429000" y="3246120"/>
+            <a:ext cx="2377440" cy="365760"/>
+          </a:xfrm>
+          <a:prstGeom prst="rect">
+            <a:avLst/>
+          </a:prstGeom>
+          <a:noFill/>
+          <a:ln/>
+        </p:spPr>
+        <p:txBody>
+          <a:bodyPr wrap="square" lIns="0" tIns="0" rIns="0" bIns="0" rtlCol="0" anchor="ctr"/>
+          <a:lstStyle/>
+          <a:p>
+            <a:pPr indent="0" marL="0">
+              <a:buNone/>
+            </a:pPr>
+            <a:r>
+              <a:rPr lang="en-US" sz="900" dirty="0">
+                <a:solidFill>
+                  <a:srgbClr val="64748B"/>
+                </a:solidFill>
+                <a:latin typeface="Arial" pitchFamily="34" charset="0"/>
+                <a:ea typeface="Arial" pitchFamily="34" charset="-122"/>
+                <a:cs typeface="Arial" pitchFamily="34" charset="-120"/>
+              </a:rPr>
+              <a:t>彩りと栄養バランスの良い朝食が特に高評価を獲得</a:t>
+            </a:r>
+            <a:endParaRPr lang="en-US" sz="900" dirty="0"/>
+          </a:p>
+        </p:txBody>
+      </p:sp>
+      <p:sp>
+        <p:nvSpPr>
+          <p:cNvPr id="39" name="Text 37"/>
+          <p:cNvSpPr/>
+          <p:nvPr/>
+        </p:nvSpPr>
+        <p:spPr>
+          <a:xfrm>
+            <a:off x="3429000" y="3657600"/>
+            <a:ext cx="2377440" cy="640080"/>
+          </a:xfrm>
+          <a:prstGeom prst="rect">
+            <a:avLst/>
+          </a:prstGeom>
+          <a:noFill/>
+          <a:ln/>
+        </p:spPr>
+        <p:txBody>
+          <a:bodyPr wrap="square" lIns="0" tIns="0" rIns="0" bIns="0" rtlCol="0" anchor="ctr"/>
+          <a:lstStyle/>
+          <a:p>
+            <a:pPr indent="0" marL="0">
+              <a:buNone/>
+            </a:pPr>
+            <a:r>
+              <a:rPr lang="en-US" sz="900" i="1" dirty="0">
+                <a:solidFill>
+                  <a:srgbClr val="3B7DD8"/>
+                </a:solidFill>
+                <a:latin typeface="Arial" pitchFamily="34" charset="0"/>
+                <a:ea typeface="Arial" pitchFamily="34" charset="-122"/>
+                <a:cs typeface="Arial" pitchFamily="34" charset="-120"/>
+              </a:rPr>
+              <a:t>「朝食は彩りも栄養バランスも抜群で満腹に。コスパ最高」</a:t>
+            </a:r>
+            <a:endParaRPr lang="en-US" sz="900" dirty="0"/>
+          </a:p>
+        </p:txBody>
+      </p:sp>
+      <p:sp>
+        <p:nvSpPr>
+          <p:cNvPr id="40" name="Shape 38"/>
+          <p:cNvSpPr/>
+          <p:nvPr/>
+        </p:nvSpPr>
+        <p:spPr>
+          <a:xfrm>
+            <a:off x="6126480" y="2880360"/>
+            <a:ext cx="2651760" cy="1600200"/>
+          </a:xfrm>
+          <a:prstGeom prst="rect">
+            <a:avLst/>
+          </a:prstGeom>
+          <a:solidFill>
+            <a:srgbClr val="FFFFFF"/>
+          </a:solidFill>
+          <a:ln/>
+          <a:effectLst>
+            <a:outerShdw sx="100000" sy="100000" kx="0" ky="0" algn="bl" rotWithShape="0" blurRad="50800" dist="25400" dir="8100000">
+              <a:srgbClr val="000000">
+                <a:alpha val="10000"/>
+              </a:srgbClr>
+            </a:outerShdw>
+          </a:effectLst>
+        </p:spPr>
+      </p:sp>
+      <p:sp>
+        <p:nvSpPr>
+          <p:cNvPr id="41" name="Shape 39"/>
+          <p:cNvSpPr/>
+          <p:nvPr/>
+        </p:nvSpPr>
+        <p:spPr>
+          <a:xfrm>
+            <a:off x="6126480" y="2880360"/>
+            <a:ext cx="54864" cy="1600200"/>
+          </a:xfrm>
+          <a:prstGeom prst="rect">
+            <a:avLst/>
+          </a:prstGeom>
+          <a:solidFill>
+            <a:srgbClr val="16A34A"/>
+          </a:solidFill>
+          <a:ln/>
+        </p:spPr>
+      </p:sp>
+      <p:sp>
+        <p:nvSpPr>
+          <p:cNvPr id="42" name="Shape 40"/>
+          <p:cNvSpPr/>
+          <p:nvPr/>
+        </p:nvSpPr>
+        <p:spPr>
+          <a:xfrm>
+            <a:off x="7955280" y="2953512"/>
+            <a:ext cx="658368" cy="228600"/>
+          </a:xfrm>
+          <a:prstGeom prst="rect">
+            <a:avLst/>
+          </a:prstGeom>
+          <a:solidFill>
+            <a:srgbClr val="DCFCE7"/>
+          </a:solidFill>
+          <a:ln/>
+        </p:spPr>
+      </p:sp>
+      <p:sp>
+        <p:nvSpPr>
+          <p:cNvPr id="43" name="Text 41"/>
+          <p:cNvSpPr/>
+          <p:nvPr/>
+        </p:nvSpPr>
+        <p:spPr>
+          <a:xfrm>
+            <a:off x="7955280" y="2953512"/>
             <a:ext cx="658368" cy="228600"/>
           </a:xfrm>
           <a:prstGeom prst="rect">
@@ -8381,13 +8787,13 @@
       </p:sp>
       <p:sp>
         <p:nvSpPr>
-          <p:cNvPr id="30" name="Text 28"/>
-          <p:cNvSpPr/>
-          <p:nvPr/>
-        </p:nvSpPr>
-        <p:spPr>
-          <a:xfrm>
-            <a:off x="594360" y="2953512"/>
+          <p:cNvPr id="44" name="Text 42"/>
+          <p:cNvSpPr/>
+          <p:nvPr/>
+        </p:nvSpPr>
+        <p:spPr>
+          <a:xfrm>
+            <a:off x="6263640" y="2953512"/>
             <a:ext cx="1645920" cy="274320"/>
           </a:xfrm>
           <a:prstGeom prst="rect">
@@ -8412,7 +8818,7 @@
                 <a:ea typeface="Arial" pitchFamily="34" charset="-122"/>
                 <a:cs typeface="Arial" pitchFamily="34" charset="-120"/>
               </a:rPr>
-              <a:t>設備・部屋</a:t>
+              <a:t>コスパ・リピート</a:t>
             </a:r>
             <a:endParaRPr lang="en-US" sz="1300" dirty="0"/>
           </a:p>
@@ -8420,13 +8826,13 @@
       </p:sp>
       <p:sp>
         <p:nvSpPr>
-          <p:cNvPr id="31" name="Text 29"/>
-          <p:cNvSpPr/>
-          <p:nvPr/>
-        </p:nvSpPr>
-        <p:spPr>
-          <a:xfrm>
-            <a:off x="594360" y="3246120"/>
+          <p:cNvPr id="45" name="Text 43"/>
+          <p:cNvSpPr/>
+          <p:nvPr/>
+        </p:nvSpPr>
+        <p:spPr>
+          <a:xfrm>
+            <a:off x="6263640" y="3246120"/>
             <a:ext cx="2377440" cy="365760"/>
           </a:xfrm>
           <a:prstGeom prst="rect">
@@ -8451,7 +8857,7 @@
                 <a:ea typeface="Arial" pitchFamily="34" charset="-122"/>
                 <a:cs typeface="Arial" pitchFamily="34" charset="-120"/>
               </a:rPr>
-              <a:t>部屋が広い、設備が整っている</a:t>
+              <a:t>老朽化を補う価格魅力と立地の良さがコスパ感を創出</a:t>
             </a:r>
             <a:endParaRPr lang="en-US" sz="900" dirty="0"/>
           </a:p>
@@ -8459,13 +8865,13 @@
       </p:sp>
       <p:sp>
         <p:nvSpPr>
-          <p:cNvPr id="32" name="Text 30"/>
-          <p:cNvSpPr/>
-          <p:nvPr/>
-        </p:nvSpPr>
-        <p:spPr>
-          <a:xfrm>
-            <a:off x="594360" y="3657600"/>
+          <p:cNvPr id="46" name="Text 44"/>
+          <p:cNvSpPr/>
+          <p:nvPr/>
+        </p:nvSpPr>
+        <p:spPr>
+          <a:xfrm>
+            <a:off x="6263640" y="3657600"/>
             <a:ext cx="2377440" cy="640080"/>
           </a:xfrm>
           <a:prstGeom prst="rect">
@@ -8490,453 +8896,7 @@
                 <a:ea typeface="Arial" pitchFamily="34" charset="-122"/>
                 <a:cs typeface="Arial" pitchFamily="34" charset="-120"/>
               </a:rPr>
-              <a:t>思ったより広くて使いやすかった</a:t>
-            </a:r>
-            <a:endParaRPr lang="en-US" sz="900" dirty="0"/>
-          </a:p>
-        </p:txBody>
-      </p:sp>
-      <p:sp>
-        <p:nvSpPr>
-          <p:cNvPr id="33" name="Shape 31"/>
-          <p:cNvSpPr/>
-          <p:nvPr/>
-        </p:nvSpPr>
-        <p:spPr>
-          <a:xfrm>
-            <a:off x="3291840" y="2880360"/>
-            <a:ext cx="2651760" cy="1600200"/>
-          </a:xfrm>
-          <a:prstGeom prst="rect">
-            <a:avLst/>
-          </a:prstGeom>
-          <a:solidFill>
-            <a:srgbClr val="FFFFFF"/>
-          </a:solidFill>
-          <a:ln/>
-          <a:effectLst>
-            <a:outerShdw sx="100000" sy="100000" kx="0" ky="0" algn="bl" rotWithShape="0" blurRad="50800" dist="25400" dir="8100000">
-              <a:srgbClr val="000000">
-                <a:alpha val="10000"/>
-              </a:srgbClr>
-            </a:outerShdw>
-          </a:effectLst>
-        </p:spPr>
-      </p:sp>
-      <p:sp>
-        <p:nvSpPr>
-          <p:cNvPr id="34" name="Shape 32"/>
-          <p:cNvSpPr/>
-          <p:nvPr/>
-        </p:nvSpPr>
-        <p:spPr>
-          <a:xfrm>
-            <a:off x="3291840" y="2880360"/>
-            <a:ext cx="54864" cy="1600200"/>
-          </a:xfrm>
-          <a:prstGeom prst="rect">
-            <a:avLst/>
-          </a:prstGeom>
-          <a:solidFill>
-            <a:srgbClr val="16A34A"/>
-          </a:solidFill>
-          <a:ln/>
-        </p:spPr>
-      </p:sp>
-      <p:sp>
-        <p:nvSpPr>
-          <p:cNvPr id="35" name="Shape 33"/>
-          <p:cNvSpPr/>
-          <p:nvPr/>
-        </p:nvSpPr>
-        <p:spPr>
-          <a:xfrm>
-            <a:off x="5120640" y="2953512"/>
-            <a:ext cx="658368" cy="228600"/>
-          </a:xfrm>
-          <a:prstGeom prst="rect">
-            <a:avLst/>
-          </a:prstGeom>
-          <a:solidFill>
-            <a:srgbClr val="DCFCE7"/>
-          </a:solidFill>
-          <a:ln/>
-        </p:spPr>
-      </p:sp>
-      <p:sp>
-        <p:nvSpPr>
-          <p:cNvPr id="36" name="Text 34"/>
-          <p:cNvSpPr/>
-          <p:nvPr/>
-        </p:nvSpPr>
-        <p:spPr>
-          <a:xfrm>
-            <a:off x="5120640" y="2953512"/>
-            <a:ext cx="658368" cy="228600"/>
-          </a:xfrm>
-          <a:prstGeom prst="rect">
-            <a:avLst/>
-          </a:prstGeom>
-          <a:noFill/>
-          <a:ln/>
-        </p:spPr>
-        <p:txBody>
-          <a:bodyPr wrap="square" lIns="0" tIns="0" rIns="0" bIns="0" rtlCol="0" anchor="ctr"/>
-          <a:lstStyle/>
-          <a:p>
-            <a:pPr algn="ctr" indent="0" marL="0">
-              <a:buNone/>
-            </a:pPr>
-            <a:r>
-              <a:rPr lang="en-US" sz="900" b="1" dirty="0">
-                <a:solidFill>
-                  <a:srgbClr val="16A34A"/>
-                </a:solidFill>
-                <a:latin typeface="Arial" pitchFamily="34" charset="0"/>
-                <a:ea typeface="Arial" pitchFamily="34" charset="-122"/>
-                <a:cs typeface="Arial" pitchFamily="34" charset="-120"/>
-              </a:rPr>
-              <a:t>7件</a:t>
-            </a:r>
-            <a:endParaRPr lang="en-US" sz="900" dirty="0"/>
-          </a:p>
-        </p:txBody>
-      </p:sp>
-      <p:sp>
-        <p:nvSpPr>
-          <p:cNvPr id="37" name="Text 35"/>
-          <p:cNvSpPr/>
-          <p:nvPr/>
-        </p:nvSpPr>
-        <p:spPr>
-          <a:xfrm>
-            <a:off x="3429000" y="2953512"/>
-            <a:ext cx="1645920" cy="274320"/>
-          </a:xfrm>
-          <a:prstGeom prst="rect">
-            <a:avLst/>
-          </a:prstGeom>
-          <a:noFill/>
-          <a:ln/>
-        </p:spPr>
-        <p:txBody>
-          <a:bodyPr wrap="square" lIns="0" tIns="0" rIns="0" bIns="0" rtlCol="0" anchor="ctr"/>
-          <a:lstStyle/>
-          <a:p>
-            <a:pPr indent="0" marL="0">
-              <a:buNone/>
-            </a:pPr>
-            <a:r>
-              <a:rPr lang="en-US" sz="1300" b="1" dirty="0">
-                <a:solidFill>
-                  <a:srgbClr val="1A2744"/>
-                </a:solidFill>
-                <a:latin typeface="Arial" pitchFamily="34" charset="0"/>
-                <a:ea typeface="Arial" pitchFamily="34" charset="-122"/>
-                <a:cs typeface="Arial" pitchFamily="34" charset="-120"/>
-              </a:rPr>
-              <a:t>朝食</a:t>
-            </a:r>
-            <a:endParaRPr lang="en-US" sz="1300" dirty="0"/>
-          </a:p>
-        </p:txBody>
-      </p:sp>
-      <p:sp>
-        <p:nvSpPr>
-          <p:cNvPr id="38" name="Text 36"/>
-          <p:cNvSpPr/>
-          <p:nvPr/>
-        </p:nvSpPr>
-        <p:spPr>
-          <a:xfrm>
-            <a:off x="3429000" y="3246120"/>
-            <a:ext cx="2377440" cy="365760"/>
-          </a:xfrm>
-          <a:prstGeom prst="rect">
-            <a:avLst/>
-          </a:prstGeom>
-          <a:noFill/>
-          <a:ln/>
-        </p:spPr>
-        <p:txBody>
-          <a:bodyPr wrap="square" lIns="0" tIns="0" rIns="0" bIns="0" rtlCol="0" anchor="ctr"/>
-          <a:lstStyle/>
-          <a:p>
-            <a:pPr indent="0" marL="0">
-              <a:buNone/>
-            </a:pPr>
-            <a:r>
-              <a:rPr lang="en-US" sz="900" dirty="0">
-                <a:solidFill>
-                  <a:srgbClr val="64748B"/>
-                </a:solidFill>
-                <a:latin typeface="Arial" pitchFamily="34" charset="0"/>
-                <a:ea typeface="Arial" pitchFamily="34" charset="-122"/>
-                <a:cs typeface="Arial" pitchFamily="34" charset="-120"/>
-              </a:rPr>
-              <a:t>朝食が美味しい、和食メニュー充実</a:t>
-            </a:r>
-            <a:endParaRPr lang="en-US" sz="900" dirty="0"/>
-          </a:p>
-        </p:txBody>
-      </p:sp>
-      <p:sp>
-        <p:nvSpPr>
-          <p:cNvPr id="39" name="Text 37"/>
-          <p:cNvSpPr/>
-          <p:nvPr/>
-        </p:nvSpPr>
-        <p:spPr>
-          <a:xfrm>
-            <a:off x="3429000" y="3657600"/>
-            <a:ext cx="2377440" cy="640080"/>
-          </a:xfrm>
-          <a:prstGeom prst="rect">
-            <a:avLst/>
-          </a:prstGeom>
-          <a:noFill/>
-          <a:ln/>
-        </p:spPr>
-        <p:txBody>
-          <a:bodyPr wrap="square" lIns="0" tIns="0" rIns="0" bIns="0" rtlCol="0" anchor="ctr"/>
-          <a:lstStyle/>
-          <a:p>
-            <a:pPr indent="0" marL="0">
-              <a:buNone/>
-            </a:pPr>
-            <a:r>
-              <a:rPr lang="en-US" sz="900" i="1" dirty="0">
-                <a:solidFill>
-                  <a:srgbClr val="3B7DD8"/>
-                </a:solidFill>
-                <a:latin typeface="Arial" pitchFamily="34" charset="0"/>
-                <a:ea typeface="Arial" pitchFamily="34" charset="-122"/>
-                <a:cs typeface="Arial" pitchFamily="34" charset="-120"/>
-              </a:rPr>
-              <a:t>朝食の和食メニューが充実していた</a:t>
-            </a:r>
-            <a:endParaRPr lang="en-US" sz="900" dirty="0"/>
-          </a:p>
-        </p:txBody>
-      </p:sp>
-      <p:sp>
-        <p:nvSpPr>
-          <p:cNvPr id="40" name="Shape 38"/>
-          <p:cNvSpPr/>
-          <p:nvPr/>
-        </p:nvSpPr>
-        <p:spPr>
-          <a:xfrm>
-            <a:off x="6126480" y="2880360"/>
-            <a:ext cx="2651760" cy="1600200"/>
-          </a:xfrm>
-          <a:prstGeom prst="rect">
-            <a:avLst/>
-          </a:prstGeom>
-          <a:solidFill>
-            <a:srgbClr val="FFFFFF"/>
-          </a:solidFill>
-          <a:ln/>
-          <a:effectLst>
-            <a:outerShdw sx="100000" sy="100000" kx="0" ky="0" algn="bl" rotWithShape="0" blurRad="50800" dist="25400" dir="8100000">
-              <a:srgbClr val="000000">
-                <a:alpha val="10000"/>
-              </a:srgbClr>
-            </a:outerShdw>
-          </a:effectLst>
-        </p:spPr>
-      </p:sp>
-      <p:sp>
-        <p:nvSpPr>
-          <p:cNvPr id="41" name="Shape 39"/>
-          <p:cNvSpPr/>
-          <p:nvPr/>
-        </p:nvSpPr>
-        <p:spPr>
-          <a:xfrm>
-            <a:off x="6126480" y="2880360"/>
-            <a:ext cx="54864" cy="1600200"/>
-          </a:xfrm>
-          <a:prstGeom prst="rect">
-            <a:avLst/>
-          </a:prstGeom>
-          <a:solidFill>
-            <a:srgbClr val="16A34A"/>
-          </a:solidFill>
-          <a:ln/>
-        </p:spPr>
-      </p:sp>
-      <p:sp>
-        <p:nvSpPr>
-          <p:cNvPr id="42" name="Shape 40"/>
-          <p:cNvSpPr/>
-          <p:nvPr/>
-        </p:nvSpPr>
-        <p:spPr>
-          <a:xfrm>
-            <a:off x="7955280" y="2953512"/>
-            <a:ext cx="658368" cy="228600"/>
-          </a:xfrm>
-          <a:prstGeom prst="rect">
-            <a:avLst/>
-          </a:prstGeom>
-          <a:solidFill>
-            <a:srgbClr val="DCFCE7"/>
-          </a:solidFill>
-          <a:ln/>
-        </p:spPr>
-      </p:sp>
-      <p:sp>
-        <p:nvSpPr>
-          <p:cNvPr id="43" name="Text 41"/>
-          <p:cNvSpPr/>
-          <p:nvPr/>
-        </p:nvSpPr>
-        <p:spPr>
-          <a:xfrm>
-            <a:off x="7955280" y="2953512"/>
-            <a:ext cx="658368" cy="228600"/>
-          </a:xfrm>
-          <a:prstGeom prst="rect">
-            <a:avLst/>
-          </a:prstGeom>
-          <a:noFill/>
-          <a:ln/>
-        </p:spPr>
-        <p:txBody>
-          <a:bodyPr wrap="square" lIns="0" tIns="0" rIns="0" bIns="0" rtlCol="0" anchor="ctr"/>
-          <a:lstStyle/>
-          <a:p>
-            <a:pPr algn="ctr" indent="0" marL="0">
-              <a:buNone/>
-            </a:pPr>
-            <a:r>
-              <a:rPr lang="en-US" sz="900" b="1" dirty="0">
-                <a:solidFill>
-                  <a:srgbClr val="16A34A"/>
-                </a:solidFill>
-                <a:latin typeface="Arial" pitchFamily="34" charset="0"/>
-                <a:ea typeface="Arial" pitchFamily="34" charset="-122"/>
-                <a:cs typeface="Arial" pitchFamily="34" charset="-120"/>
-              </a:rPr>
-              <a:t>6件</a:t>
-            </a:r>
-            <a:endParaRPr lang="en-US" sz="900" dirty="0"/>
-          </a:p>
-        </p:txBody>
-      </p:sp>
-      <p:sp>
-        <p:nvSpPr>
-          <p:cNvPr id="44" name="Text 42"/>
-          <p:cNvSpPr/>
-          <p:nvPr/>
-        </p:nvSpPr>
-        <p:spPr>
-          <a:xfrm>
-            <a:off x="6263640" y="2953512"/>
-            <a:ext cx="1645920" cy="274320"/>
-          </a:xfrm>
-          <a:prstGeom prst="rect">
-            <a:avLst/>
-          </a:prstGeom>
-          <a:noFill/>
-          <a:ln/>
-        </p:spPr>
-        <p:txBody>
-          <a:bodyPr wrap="square" lIns="0" tIns="0" rIns="0" bIns="0" rtlCol="0" anchor="ctr"/>
-          <a:lstStyle/>
-          <a:p>
-            <a:pPr indent="0" marL="0">
-              <a:buNone/>
-            </a:pPr>
-            <a:r>
-              <a:rPr lang="en-US" sz="1300" b="1" dirty="0">
-                <a:solidFill>
-                  <a:srgbClr val="1A2744"/>
-                </a:solidFill>
-                <a:latin typeface="Arial" pitchFamily="34" charset="0"/>
-                <a:ea typeface="Arial" pitchFamily="34" charset="-122"/>
-                <a:cs typeface="Arial" pitchFamily="34" charset="-120"/>
-              </a:rPr>
-              <a:t>スタッフ対応</a:t>
-            </a:r>
-            <a:endParaRPr lang="en-US" sz="1300" dirty="0"/>
-          </a:p>
-        </p:txBody>
-      </p:sp>
-      <p:sp>
-        <p:nvSpPr>
-          <p:cNvPr id="45" name="Text 43"/>
-          <p:cNvSpPr/>
-          <p:nvPr/>
-        </p:nvSpPr>
-        <p:spPr>
-          <a:xfrm>
-            <a:off x="6263640" y="3246120"/>
-            <a:ext cx="2377440" cy="365760"/>
-          </a:xfrm>
-          <a:prstGeom prst="rect">
-            <a:avLst/>
-          </a:prstGeom>
-          <a:noFill/>
-          <a:ln/>
-        </p:spPr>
-        <p:txBody>
-          <a:bodyPr wrap="square" lIns="0" tIns="0" rIns="0" bIns="0" rtlCol="0" anchor="ctr"/>
-          <a:lstStyle/>
-          <a:p>
-            <a:pPr indent="0" marL="0">
-              <a:buNone/>
-            </a:pPr>
-            <a:r>
-              <a:rPr lang="en-US" sz="900" dirty="0">
-                <a:solidFill>
-                  <a:srgbClr val="64748B"/>
-                </a:solidFill>
-                <a:latin typeface="Arial" pitchFamily="34" charset="0"/>
-                <a:ea typeface="Arial" pitchFamily="34" charset="-122"/>
-                <a:cs typeface="Arial" pitchFamily="34" charset="-120"/>
-              </a:rPr>
-              <a:t>親切丁寧、フロントの笑顔</a:t>
-            </a:r>
-            <a:endParaRPr lang="en-US" sz="900" dirty="0"/>
-          </a:p>
-        </p:txBody>
-      </p:sp>
-      <p:sp>
-        <p:nvSpPr>
-          <p:cNvPr id="46" name="Text 44"/>
-          <p:cNvSpPr/>
-          <p:nvPr/>
-        </p:nvSpPr>
-        <p:spPr>
-          <a:xfrm>
-            <a:off x="6263640" y="3657600"/>
-            <a:ext cx="2377440" cy="640080"/>
-          </a:xfrm>
-          <a:prstGeom prst="rect">
-            <a:avLst/>
-          </a:prstGeom>
-          <a:noFill/>
-          <a:ln/>
-        </p:spPr>
-        <p:txBody>
-          <a:bodyPr wrap="square" lIns="0" tIns="0" rIns="0" bIns="0" rtlCol="0" anchor="ctr"/>
-          <a:lstStyle/>
-          <a:p>
-            <a:pPr indent="0" marL="0">
-              <a:buNone/>
-            </a:pPr>
-            <a:r>
-              <a:rPr lang="en-US" sz="900" i="1" dirty="0">
-                <a:solidFill>
-                  <a:srgbClr val="3B7DD8"/>
-                </a:solidFill>
-                <a:latin typeface="Arial" pitchFamily="34" charset="0"/>
-                <a:ea typeface="Arial" pitchFamily="34" charset="-122"/>
-                <a:cs typeface="Arial" pitchFamily="34" charset="-120"/>
-              </a:rPr>
-              <a:t>スタッフの対応が親切で好感が持てた</a:t>
+              <a:t>「コスパ最高だし、トレインビューで読書するのが気持ちよかった」</a:t>
             </a:r>
             <a:endParaRPr lang="en-US" sz="900" dirty="0"/>
           </a:p>
@@ -9558,7 +9518,7 @@
                           <a:ea typeface="Arial" pitchFamily="34" charset="-122"/>
                           <a:cs typeface="Arial" pitchFamily="34" charset="-120"/>
                         </a:rPr>
-                        <a:t>設備老朽化</a:t>
+                        <a:t>設備の老朽化</a:t>
                       </a:r>
                       <a:endParaRPr lang="en-US" sz="900" dirty="0">
                         <a:latin typeface="Arial" charset="0"/>
@@ -9626,7 +9586,7 @@
                           <a:ea typeface="Arial" pitchFamily="34" charset="-122"/>
                           <a:cs typeface="Arial" pitchFamily="34" charset="-120"/>
                         </a:rPr>
-                        <a:t>壁紙・カーペット・家具の経年劣化</a:t>
+                        <a:t>浴槽の穴・ヒビ、廊下カーペットの劣化、ハウスダスト問題など設備劣化の具体的指摘多数</a:t>
                       </a:r>
                       <a:endParaRPr lang="en-US" sz="900" dirty="0">
                         <a:latin typeface="Arial" charset="0"/>
@@ -9758,13 +9718,13 @@
                       <a:r>
                         <a:rPr lang="en-US" sz="1200" b="1" dirty="0">
                           <a:solidFill>
-                            <a:srgbClr val="DC2626"/>
+                            <a:srgbClr val="EA580C"/>
                           </a:solidFill>
                           <a:latin typeface="Arial" pitchFamily="34" charset="0"/>
                           <a:ea typeface="Arial" pitchFamily="34" charset="-122"/>
                           <a:cs typeface="Arial" pitchFamily="34" charset="-120"/>
                         </a:rPr>
-                        <a:t>S</a:t>
+                        <a:t>A</a:t>
                       </a:r>
                       <a:endParaRPr lang="en-US" sz="1200" dirty="0">
                         <a:latin typeface="Arial" charset="0"/>
@@ -9832,7 +9792,7 @@
                           <a:ea typeface="Arial" pitchFamily="34" charset="-122"/>
                           <a:cs typeface="Arial" pitchFamily="34" charset="-120"/>
                         </a:rPr>
-                        <a:t>騒音・防音</a:t>
+                        <a:t>騒音・防音問題</a:t>
                       </a:r>
                       <a:endParaRPr lang="en-US" sz="900" dirty="0">
                         <a:latin typeface="Arial" charset="0"/>
@@ -9900,7 +9860,7 @@
                           <a:ea typeface="Arial" pitchFamily="34" charset="-122"/>
                           <a:cs typeface="Arial" pitchFamily="34" charset="-120"/>
                         </a:rPr>
-                        <a:t>隣室音・外部騒音・設備音が問題</a:t>
+                        <a:t>「ボロアパート並みの防音性能」。電車の音が睡眠を妨げるレベルで線路側客室での問題深刻</a:t>
                       </a:r>
                       <a:endParaRPr lang="en-US" sz="900" dirty="0">
                         <a:latin typeface="Arial" charset="0"/>
@@ -9968,7 +9928,7 @@
                           <a:ea typeface="Arial" pitchFamily="34" charset="-122"/>
                           <a:cs typeface="Arial" pitchFamily="34" charset="-120"/>
                         </a:rPr>
-                        <a:t>9件</a:t>
+                        <a:t>8件</a:t>
                       </a:r>
                       <a:endParaRPr lang="en-US" sz="900" dirty="0">
                         <a:latin typeface="Arial" charset="0"/>
@@ -10106,7 +10066,7 @@
                           <a:ea typeface="Arial" pitchFamily="34" charset="-122"/>
                           <a:cs typeface="Arial" pitchFamily="34" charset="-120"/>
                         </a:rPr>
-                        <a:t>水回り</a:t>
+                        <a:t>アクセスの分かりにくさ</a:t>
                       </a:r>
                       <a:endParaRPr lang="en-US" sz="900" dirty="0">
                         <a:latin typeface="Arial" charset="0"/>
@@ -10174,7 +10134,7 @@
                           <a:ea typeface="Arial" pitchFamily="34" charset="-122"/>
                           <a:cs typeface="Arial" pitchFamily="34" charset="-120"/>
                         </a:rPr>
-                        <a:t>水圧弱い、排水遅い、バスルーム狭い</a:t>
+                        <a:t>「地図がないとたどり着けない」。駅からの道順が不明瞭で特に初回利用者の不満が大きい</a:t>
                       </a:r>
                       <a:endParaRPr lang="en-US" sz="900" dirty="0">
                         <a:latin typeface="Arial" charset="0"/>
@@ -10242,7 +10202,7 @@
                           <a:ea typeface="Arial" pitchFamily="34" charset="-122"/>
                           <a:cs typeface="Arial" pitchFamily="34" charset="-120"/>
                         </a:rPr>
-                        <a:t>6件</a:t>
+                        <a:t>3件</a:t>
                       </a:r>
                       <a:endParaRPr lang="en-US" sz="900" dirty="0">
                         <a:latin typeface="Arial" charset="0"/>
@@ -10306,13 +10266,13 @@
                       <a:r>
                         <a:rPr lang="en-US" sz="1200" b="1" dirty="0">
                           <a:solidFill>
-                            <a:srgbClr val="EA580C"/>
+                            <a:srgbClr val="D4A843"/>
                           </a:solidFill>
                           <a:latin typeface="Arial" pitchFamily="34" charset="0"/>
                           <a:ea typeface="Arial" pitchFamily="34" charset="-122"/>
                           <a:cs typeface="Arial" pitchFamily="34" charset="-120"/>
                         </a:rPr>
-                        <a:t>A</a:t>
+                        <a:t>B</a:t>
                       </a:r>
                       <a:endParaRPr lang="en-US" sz="1200" dirty="0">
                         <a:latin typeface="Arial" charset="0"/>
@@ -10380,7 +10340,7 @@
                           <a:ea typeface="Arial" pitchFamily="34" charset="-122"/>
                           <a:cs typeface="Arial" pitchFamily="34" charset="-120"/>
                         </a:rPr>
-                        <a:t>清掃品質</a:t>
+                        <a:t>朝食クオリティ</a:t>
                       </a:r>
                       <a:endParaRPr lang="en-US" sz="900" dirty="0">
                         <a:latin typeface="Arial" charset="0"/>
@@ -10448,7 +10408,7 @@
                           <a:ea typeface="Arial" pitchFamily="34" charset="-122"/>
                           <a:cs typeface="Arial" pitchFamily="34" charset="-120"/>
                         </a:rPr>
-                        <a:t>髪の毛、ほこり、ベッド周りの清掃不足</a:t>
+                        <a:t>「おかずが少ない・貧素」という朝食内容への指摘。内容と価格バランスへの不満</a:t>
                       </a:r>
                       <a:endParaRPr lang="en-US" sz="900" dirty="0">
                         <a:latin typeface="Arial" charset="0"/>
@@ -10516,7 +10476,7 @@
                           <a:ea typeface="Arial" pitchFamily="34" charset="-122"/>
                           <a:cs typeface="Arial" pitchFamily="34" charset="-120"/>
                         </a:rPr>
-                        <a:t>5件</a:t>
+                        <a:t>2件</a:t>
                       </a:r>
                       <a:endParaRPr lang="en-US" sz="900" dirty="0">
                         <a:latin typeface="Arial" charset="0"/>
@@ -10654,7 +10614,7 @@
                           <a:ea typeface="Arial" pitchFamily="34" charset="-122"/>
                           <a:cs typeface="Arial" pitchFamily="34" charset="-120"/>
                         </a:rPr>
-                        <a:t>コスパ割高感</a:t>
+                        <a:t>乾燥・加湿器不足</a:t>
                       </a:r>
                       <a:endParaRPr lang="en-US" sz="900" dirty="0">
                         <a:latin typeface="Arial" charset="0"/>
@@ -10722,7 +10682,7 @@
                           <a:ea typeface="Arial" pitchFamily="34" charset="-122"/>
                           <a:cs typeface="Arial" pitchFamily="34" charset="-120"/>
                         </a:rPr>
-                        <a:t>設備の古さに対して料金が高い</a:t>
+                        <a:t>「老舗のビジネスホテルなのに加湿器ありません」という乾燥問題への不満</a:t>
                       </a:r>
                       <a:endParaRPr lang="en-US" sz="900" dirty="0">
                         <a:latin typeface="Arial" charset="0"/>
@@ -10790,555 +10750,7 @@
                           <a:ea typeface="Arial" pitchFamily="34" charset="-122"/>
                           <a:cs typeface="Arial" pitchFamily="34" charset="-120"/>
                         </a:rPr>
-                        <a:t>4件</a:t>
-                      </a:r>
-                      <a:endParaRPr lang="en-US" sz="900" dirty="0">
-                        <a:latin typeface="Arial" charset="0"/>
-                        <a:ea typeface="Arial" charset="0"/>
-                        <a:cs typeface="Arial" charset="0"/>
-                      </a:endParaRPr>
-                    </a:p>
-                  </a:txBody>
-                  <a:tcPr marL="91440" marR="91440" marT="45720" marB="45720">
-                    <a:lnL w="6350" cap="flat" cmpd="sng" algn="ctr">
-                      <a:solidFill>
-                        <a:srgbClr val="CBD5E1"/>
-                      </a:solidFill>
-                      <a:prstDash val="solid"/>
-                      <a:round/>
-                      <a:headEnd type="none" w="med" len="med"/>
-                      <a:tailEnd type="none" w="med" len="med"/>
-                    </a:lnL>
-                    <a:lnR w="6350" cap="flat" cmpd="sng" algn="ctr">
-                      <a:solidFill>
-                        <a:srgbClr val="CBD5E1"/>
-                      </a:solidFill>
-                      <a:prstDash val="solid"/>
-                      <a:round/>
-                      <a:headEnd type="none" w="med" len="med"/>
-                      <a:tailEnd type="none" w="med" len="med"/>
-                    </a:lnR>
-                    <a:lnT w="6350" cap="flat" cmpd="sng" algn="ctr">
-                      <a:solidFill>
-                        <a:srgbClr val="CBD5E1"/>
-                      </a:solidFill>
-                      <a:prstDash val="solid"/>
-                      <a:round/>
-                      <a:headEnd type="none" w="med" len="med"/>
-                      <a:tailEnd type="none" w="med" len="med"/>
-                    </a:lnT>
-                    <a:lnB w="6350" cap="flat" cmpd="sng" algn="ctr">
-                      <a:solidFill>
-                        <a:srgbClr val="CBD5E1"/>
-                      </a:solidFill>
-                      <a:prstDash val="solid"/>
-                      <a:round/>
-                      <a:headEnd type="none" w="med" len="med"/>
-                      <a:tailEnd type="none" w="med" len="med"/>
-                    </a:lnB>
-                    <a:solidFill>
-                      <a:srgbClr val="E8EFF8"/>
-                    </a:solidFill>
-                  </a:tcPr>
-                </a:tc>
-              </a:tr>
-              <a:tr h="320040">
-                <a:tc>
-                  <a:txBody>
-                    <a:bodyPr/>
-                    <a:lstStyle/>
-                    <a:p>
-                      <a:pPr algn="ctr" indent="0" marL="0">
-                        <a:buNone/>
-                      </a:pPr>
-                      <a:r>
-                        <a:rPr lang="en-US" sz="1200" b="1" dirty="0">
-                          <a:solidFill>
-                            <a:srgbClr val="D4A843"/>
-                          </a:solidFill>
-                          <a:latin typeface="Arial" pitchFamily="34" charset="0"/>
-                          <a:ea typeface="Arial" pitchFamily="34" charset="-122"/>
-                          <a:cs typeface="Arial" pitchFamily="34" charset="-120"/>
-                        </a:rPr>
-                        <a:t>B</a:t>
-                      </a:r>
-                      <a:endParaRPr lang="en-US" sz="1200" dirty="0">
-                        <a:latin typeface="Arial" charset="0"/>
-                        <a:ea typeface="Arial" charset="0"/>
-                        <a:cs typeface="Arial" charset="0"/>
-                      </a:endParaRPr>
-                    </a:p>
-                  </a:txBody>
-                  <a:tcPr marL="91440" marR="91440" marT="45720" marB="45720">
-                    <a:lnL w="6350" cap="flat" cmpd="sng" algn="ctr">
-                      <a:solidFill>
-                        <a:srgbClr val="CBD5E1"/>
-                      </a:solidFill>
-                      <a:prstDash val="solid"/>
-                      <a:round/>
-                      <a:headEnd type="none" w="med" len="med"/>
-                      <a:tailEnd type="none" w="med" len="med"/>
-                    </a:lnL>
-                    <a:lnR w="6350" cap="flat" cmpd="sng" algn="ctr">
-                      <a:solidFill>
-                        <a:srgbClr val="CBD5E1"/>
-                      </a:solidFill>
-                      <a:prstDash val="solid"/>
-                      <a:round/>
-                      <a:headEnd type="none" w="med" len="med"/>
-                      <a:tailEnd type="none" w="med" len="med"/>
-                    </a:lnR>
-                    <a:lnT w="6350" cap="flat" cmpd="sng" algn="ctr">
-                      <a:solidFill>
-                        <a:srgbClr val="CBD5E1"/>
-                      </a:solidFill>
-                      <a:prstDash val="solid"/>
-                      <a:round/>
-                      <a:headEnd type="none" w="med" len="med"/>
-                      <a:tailEnd type="none" w="med" len="med"/>
-                    </a:lnT>
-                    <a:lnB w="6350" cap="flat" cmpd="sng" algn="ctr">
-                      <a:solidFill>
-                        <a:srgbClr val="CBD5E1"/>
-                      </a:solidFill>
-                      <a:prstDash val="solid"/>
-                      <a:round/>
-                      <a:headEnd type="none" w="med" len="med"/>
-                      <a:tailEnd type="none" w="med" len="med"/>
-                    </a:lnB>
-                    <a:solidFill>
-                      <a:srgbClr val="FFFFFF"/>
-                    </a:solidFill>
-                  </a:tcPr>
-                </a:tc>
-                <a:tc>
-                  <a:txBody>
-                    <a:bodyPr/>
-                    <a:lstStyle/>
-                    <a:p>
-                      <a:pPr indent="0" marL="0">
-                        <a:buNone/>
-                      </a:pPr>
-                      <a:r>
-                        <a:rPr lang="en-US" sz="900" b="1" dirty="0">
-                          <a:solidFill>
-                            <a:srgbClr val="334155"/>
-                          </a:solidFill>
-                          <a:latin typeface="Arial" pitchFamily="34" charset="0"/>
-                          <a:ea typeface="Arial" pitchFamily="34" charset="-122"/>
-                          <a:cs typeface="Arial" pitchFamily="34" charset="-120"/>
-                        </a:rPr>
-                        <a:t>立地（ネガティブ）</a:t>
-                      </a:r>
-                      <a:endParaRPr lang="en-US" sz="900" dirty="0">
-                        <a:latin typeface="Arial" charset="0"/>
-                        <a:ea typeface="Arial" charset="0"/>
-                        <a:cs typeface="Arial" charset="0"/>
-                      </a:endParaRPr>
-                    </a:p>
-                  </a:txBody>
-                  <a:tcPr marL="91440" marR="91440" marT="45720" marB="45720">
-                    <a:lnL w="6350" cap="flat" cmpd="sng" algn="ctr">
-                      <a:solidFill>
-                        <a:srgbClr val="CBD5E1"/>
-                      </a:solidFill>
-                      <a:prstDash val="solid"/>
-                      <a:round/>
-                      <a:headEnd type="none" w="med" len="med"/>
-                      <a:tailEnd type="none" w="med" len="med"/>
-                    </a:lnL>
-                    <a:lnR w="6350" cap="flat" cmpd="sng" algn="ctr">
-                      <a:solidFill>
-                        <a:srgbClr val="CBD5E1"/>
-                      </a:solidFill>
-                      <a:prstDash val="solid"/>
-                      <a:round/>
-                      <a:headEnd type="none" w="med" len="med"/>
-                      <a:tailEnd type="none" w="med" len="med"/>
-                    </a:lnR>
-                    <a:lnT w="6350" cap="flat" cmpd="sng" algn="ctr">
-                      <a:solidFill>
-                        <a:srgbClr val="CBD5E1"/>
-                      </a:solidFill>
-                      <a:prstDash val="solid"/>
-                      <a:round/>
-                      <a:headEnd type="none" w="med" len="med"/>
-                      <a:tailEnd type="none" w="med" len="med"/>
-                    </a:lnT>
-                    <a:lnB w="6350" cap="flat" cmpd="sng" algn="ctr">
-                      <a:solidFill>
-                        <a:srgbClr val="CBD5E1"/>
-                      </a:solidFill>
-                      <a:prstDash val="solid"/>
-                      <a:round/>
-                      <a:headEnd type="none" w="med" len="med"/>
-                      <a:tailEnd type="none" w="med" len="med"/>
-                    </a:lnB>
-                    <a:solidFill>
-                      <a:srgbClr val="FFFFFF"/>
-                    </a:solidFill>
-                  </a:tcPr>
-                </a:tc>
-                <a:tc>
-                  <a:txBody>
-                    <a:bodyPr/>
-                    <a:lstStyle/>
-                    <a:p>
-                      <a:pPr indent="0" marL="0">
-                        <a:buNone/>
-                      </a:pPr>
-                      <a:r>
-                        <a:rPr lang="en-US" sz="900" dirty="0">
-                          <a:solidFill>
-                            <a:srgbClr val="64748B"/>
-                          </a:solidFill>
-                          <a:latin typeface="Arial" pitchFamily="34" charset="0"/>
-                          <a:ea typeface="Arial" pitchFamily="34" charset="-122"/>
-                          <a:cs typeface="Arial" pitchFamily="34" charset="-120"/>
-                        </a:rPr>
-                        <a:t>道順不明、夜道が暗い、坂がある</a:t>
-                      </a:r>
-                      <a:endParaRPr lang="en-US" sz="900" dirty="0">
-                        <a:latin typeface="Arial" charset="0"/>
-                        <a:ea typeface="Arial" charset="0"/>
-                        <a:cs typeface="Arial" charset="0"/>
-                      </a:endParaRPr>
-                    </a:p>
-                  </a:txBody>
-                  <a:tcPr marL="91440" marR="91440" marT="45720" marB="45720">
-                    <a:lnL w="6350" cap="flat" cmpd="sng" algn="ctr">
-                      <a:solidFill>
-                        <a:srgbClr val="CBD5E1"/>
-                      </a:solidFill>
-                      <a:prstDash val="solid"/>
-                      <a:round/>
-                      <a:headEnd type="none" w="med" len="med"/>
-                      <a:tailEnd type="none" w="med" len="med"/>
-                    </a:lnL>
-                    <a:lnR w="6350" cap="flat" cmpd="sng" algn="ctr">
-                      <a:solidFill>
-                        <a:srgbClr val="CBD5E1"/>
-                      </a:solidFill>
-                      <a:prstDash val="solid"/>
-                      <a:round/>
-                      <a:headEnd type="none" w="med" len="med"/>
-                      <a:tailEnd type="none" w="med" len="med"/>
-                    </a:lnR>
-                    <a:lnT w="6350" cap="flat" cmpd="sng" algn="ctr">
-                      <a:solidFill>
-                        <a:srgbClr val="CBD5E1"/>
-                      </a:solidFill>
-                      <a:prstDash val="solid"/>
-                      <a:round/>
-                      <a:headEnd type="none" w="med" len="med"/>
-                      <a:tailEnd type="none" w="med" len="med"/>
-                    </a:lnT>
-                    <a:lnB w="6350" cap="flat" cmpd="sng" algn="ctr">
-                      <a:solidFill>
-                        <a:srgbClr val="CBD5E1"/>
-                      </a:solidFill>
-                      <a:prstDash val="solid"/>
-                      <a:round/>
-                      <a:headEnd type="none" w="med" len="med"/>
-                      <a:tailEnd type="none" w="med" len="med"/>
-                    </a:lnB>
-                    <a:solidFill>
-                      <a:srgbClr val="FFFFFF"/>
-                    </a:solidFill>
-                  </a:tcPr>
-                </a:tc>
-                <a:tc>
-                  <a:txBody>
-                    <a:bodyPr/>
-                    <a:lstStyle/>
-                    <a:p>
-                      <a:pPr algn="ctr" indent="0" marL="0">
-                        <a:buNone/>
-                      </a:pPr>
-                      <a:r>
-                        <a:rPr lang="en-US" sz="900" dirty="0">
-                          <a:solidFill>
-                            <a:srgbClr val="334155"/>
-                          </a:solidFill>
-                          <a:latin typeface="Arial" pitchFamily="34" charset="0"/>
-                          <a:ea typeface="Arial" pitchFamily="34" charset="-122"/>
-                          <a:cs typeface="Arial" pitchFamily="34" charset="-120"/>
-                        </a:rPr>
-                        <a:t>3件</a:t>
-                      </a:r>
-                      <a:endParaRPr lang="en-US" sz="900" dirty="0">
-                        <a:latin typeface="Arial" charset="0"/>
-                        <a:ea typeface="Arial" charset="0"/>
-                        <a:cs typeface="Arial" charset="0"/>
-                      </a:endParaRPr>
-                    </a:p>
-                  </a:txBody>
-                  <a:tcPr marL="91440" marR="91440" marT="45720" marB="45720">
-                    <a:lnL w="6350" cap="flat" cmpd="sng" algn="ctr">
-                      <a:solidFill>
-                        <a:srgbClr val="CBD5E1"/>
-                      </a:solidFill>
-                      <a:prstDash val="solid"/>
-                      <a:round/>
-                      <a:headEnd type="none" w="med" len="med"/>
-                      <a:tailEnd type="none" w="med" len="med"/>
-                    </a:lnL>
-                    <a:lnR w="6350" cap="flat" cmpd="sng" algn="ctr">
-                      <a:solidFill>
-                        <a:srgbClr val="CBD5E1"/>
-                      </a:solidFill>
-                      <a:prstDash val="solid"/>
-                      <a:round/>
-                      <a:headEnd type="none" w="med" len="med"/>
-                      <a:tailEnd type="none" w="med" len="med"/>
-                    </a:lnR>
-                    <a:lnT w="6350" cap="flat" cmpd="sng" algn="ctr">
-                      <a:solidFill>
-                        <a:srgbClr val="CBD5E1"/>
-                      </a:solidFill>
-                      <a:prstDash val="solid"/>
-                      <a:round/>
-                      <a:headEnd type="none" w="med" len="med"/>
-                      <a:tailEnd type="none" w="med" len="med"/>
-                    </a:lnT>
-                    <a:lnB w="6350" cap="flat" cmpd="sng" algn="ctr">
-                      <a:solidFill>
-                        <a:srgbClr val="CBD5E1"/>
-                      </a:solidFill>
-                      <a:prstDash val="solid"/>
-                      <a:round/>
-                      <a:headEnd type="none" w="med" len="med"/>
-                      <a:tailEnd type="none" w="med" len="med"/>
-                    </a:lnB>
-                    <a:solidFill>
-                      <a:srgbClr val="FFFFFF"/>
-                    </a:solidFill>
-                  </a:tcPr>
-                </a:tc>
-              </a:tr>
-              <a:tr h="320040">
-                <a:tc>
-                  <a:txBody>
-                    <a:bodyPr/>
-                    <a:lstStyle/>
-                    <a:p>
-                      <a:pPr algn="ctr" indent="0" marL="0">
-                        <a:buNone/>
-                      </a:pPr>
-                      <a:r>
-                        <a:rPr lang="en-US" sz="1200" b="1" dirty="0">
-                          <a:solidFill>
-                            <a:srgbClr val="94A3B8"/>
-                          </a:solidFill>
-                          <a:latin typeface="Arial" pitchFamily="34" charset="0"/>
-                          <a:ea typeface="Arial" pitchFamily="34" charset="-122"/>
-                          <a:cs typeface="Arial" pitchFamily="34" charset="-120"/>
-                        </a:rPr>
-                        <a:t>C</a:t>
-                      </a:r>
-                      <a:endParaRPr lang="en-US" sz="1200" dirty="0">
-                        <a:latin typeface="Arial" charset="0"/>
-                        <a:ea typeface="Arial" charset="0"/>
-                        <a:cs typeface="Arial" charset="0"/>
-                      </a:endParaRPr>
-                    </a:p>
-                  </a:txBody>
-                  <a:tcPr marL="91440" marR="91440" marT="45720" marB="45720">
-                    <a:lnL w="6350" cap="flat" cmpd="sng" algn="ctr">
-                      <a:solidFill>
-                        <a:srgbClr val="CBD5E1"/>
-                      </a:solidFill>
-                      <a:prstDash val="solid"/>
-                      <a:round/>
-                      <a:headEnd type="none" w="med" len="med"/>
-                      <a:tailEnd type="none" w="med" len="med"/>
-                    </a:lnL>
-                    <a:lnR w="6350" cap="flat" cmpd="sng" algn="ctr">
-                      <a:solidFill>
-                        <a:srgbClr val="CBD5E1"/>
-                      </a:solidFill>
-                      <a:prstDash val="solid"/>
-                      <a:round/>
-                      <a:headEnd type="none" w="med" len="med"/>
-                      <a:tailEnd type="none" w="med" len="med"/>
-                    </a:lnR>
-                    <a:lnT w="6350" cap="flat" cmpd="sng" algn="ctr">
-                      <a:solidFill>
-                        <a:srgbClr val="CBD5E1"/>
-                      </a:solidFill>
-                      <a:prstDash val="solid"/>
-                      <a:round/>
-                      <a:headEnd type="none" w="med" len="med"/>
-                      <a:tailEnd type="none" w="med" len="med"/>
-                    </a:lnT>
-                    <a:lnB w="6350" cap="flat" cmpd="sng" algn="ctr">
-                      <a:solidFill>
-                        <a:srgbClr val="CBD5E1"/>
-                      </a:solidFill>
-                      <a:prstDash val="solid"/>
-                      <a:round/>
-                      <a:headEnd type="none" w="med" len="med"/>
-                      <a:tailEnd type="none" w="med" len="med"/>
-                    </a:lnB>
-                    <a:solidFill>
-                      <a:srgbClr val="E8EFF8"/>
-                    </a:solidFill>
-                  </a:tcPr>
-                </a:tc>
-                <a:tc>
-                  <a:txBody>
-                    <a:bodyPr/>
-                    <a:lstStyle/>
-                    <a:p>
-                      <a:pPr indent="0" marL="0">
-                        <a:buNone/>
-                      </a:pPr>
-                      <a:r>
-                        <a:rPr lang="en-US" sz="900" b="1" dirty="0">
-                          <a:solidFill>
-                            <a:srgbClr val="334155"/>
-                          </a:solidFill>
-                          <a:latin typeface="Arial" pitchFamily="34" charset="0"/>
-                          <a:ea typeface="Arial" pitchFamily="34" charset="-122"/>
-                          <a:cs typeface="Arial" pitchFamily="34" charset="-120"/>
-                        </a:rPr>
-                        <a:t>タバコ臭</a:t>
-                      </a:r>
-                      <a:endParaRPr lang="en-US" sz="900" dirty="0">
-                        <a:latin typeface="Arial" charset="0"/>
-                        <a:ea typeface="Arial" charset="0"/>
-                        <a:cs typeface="Arial" charset="0"/>
-                      </a:endParaRPr>
-                    </a:p>
-                  </a:txBody>
-                  <a:tcPr marL="91440" marR="91440" marT="45720" marB="45720">
-                    <a:lnL w="6350" cap="flat" cmpd="sng" algn="ctr">
-                      <a:solidFill>
-                        <a:srgbClr val="CBD5E1"/>
-                      </a:solidFill>
-                      <a:prstDash val="solid"/>
-                      <a:round/>
-                      <a:headEnd type="none" w="med" len="med"/>
-                      <a:tailEnd type="none" w="med" len="med"/>
-                    </a:lnL>
-                    <a:lnR w="6350" cap="flat" cmpd="sng" algn="ctr">
-                      <a:solidFill>
-                        <a:srgbClr val="CBD5E1"/>
-                      </a:solidFill>
-                      <a:prstDash val="solid"/>
-                      <a:round/>
-                      <a:headEnd type="none" w="med" len="med"/>
-                      <a:tailEnd type="none" w="med" len="med"/>
-                    </a:lnR>
-                    <a:lnT w="6350" cap="flat" cmpd="sng" algn="ctr">
-                      <a:solidFill>
-                        <a:srgbClr val="CBD5E1"/>
-                      </a:solidFill>
-                      <a:prstDash val="solid"/>
-                      <a:round/>
-                      <a:headEnd type="none" w="med" len="med"/>
-                      <a:tailEnd type="none" w="med" len="med"/>
-                    </a:lnT>
-                    <a:lnB w="6350" cap="flat" cmpd="sng" algn="ctr">
-                      <a:solidFill>
-                        <a:srgbClr val="CBD5E1"/>
-                      </a:solidFill>
-                      <a:prstDash val="solid"/>
-                      <a:round/>
-                      <a:headEnd type="none" w="med" len="med"/>
-                      <a:tailEnd type="none" w="med" len="med"/>
-                    </a:lnB>
-                    <a:solidFill>
-                      <a:srgbClr val="E8EFF8"/>
-                    </a:solidFill>
-                  </a:tcPr>
-                </a:tc>
-                <a:tc>
-                  <a:txBody>
-                    <a:bodyPr/>
-                    <a:lstStyle/>
-                    <a:p>
-                      <a:pPr indent="0" marL="0">
-                        <a:buNone/>
-                      </a:pPr>
-                      <a:r>
-                        <a:rPr lang="en-US" sz="900" dirty="0">
-                          <a:solidFill>
-                            <a:srgbClr val="64748B"/>
-                          </a:solidFill>
-                          <a:latin typeface="Arial" pitchFamily="34" charset="0"/>
-                          <a:ea typeface="Arial" pitchFamily="34" charset="-122"/>
-                          <a:cs typeface="Arial" pitchFamily="34" charset="-120"/>
-                        </a:rPr>
-                        <a:t>禁煙室でもタバコの匂い</a:t>
-                      </a:r>
-                      <a:endParaRPr lang="en-US" sz="900" dirty="0">
-                        <a:latin typeface="Arial" charset="0"/>
-                        <a:ea typeface="Arial" charset="0"/>
-                        <a:cs typeface="Arial" charset="0"/>
-                      </a:endParaRPr>
-                    </a:p>
-                  </a:txBody>
-                  <a:tcPr marL="91440" marR="91440" marT="45720" marB="45720">
-                    <a:lnL w="6350" cap="flat" cmpd="sng" algn="ctr">
-                      <a:solidFill>
-                        <a:srgbClr val="CBD5E1"/>
-                      </a:solidFill>
-                      <a:prstDash val="solid"/>
-                      <a:round/>
-                      <a:headEnd type="none" w="med" len="med"/>
-                      <a:tailEnd type="none" w="med" len="med"/>
-                    </a:lnL>
-                    <a:lnR w="6350" cap="flat" cmpd="sng" algn="ctr">
-                      <a:solidFill>
-                        <a:srgbClr val="CBD5E1"/>
-                      </a:solidFill>
-                      <a:prstDash val="solid"/>
-                      <a:round/>
-                      <a:headEnd type="none" w="med" len="med"/>
-                      <a:tailEnd type="none" w="med" len="med"/>
-                    </a:lnR>
-                    <a:lnT w="6350" cap="flat" cmpd="sng" algn="ctr">
-                      <a:solidFill>
-                        <a:srgbClr val="CBD5E1"/>
-                      </a:solidFill>
-                      <a:prstDash val="solid"/>
-                      <a:round/>
-                      <a:headEnd type="none" w="med" len="med"/>
-                      <a:tailEnd type="none" w="med" len="med"/>
-                    </a:lnT>
-                    <a:lnB w="6350" cap="flat" cmpd="sng" algn="ctr">
-                      <a:solidFill>
-                        <a:srgbClr val="CBD5E1"/>
-                      </a:solidFill>
-                      <a:prstDash val="solid"/>
-                      <a:round/>
-                      <a:headEnd type="none" w="med" len="med"/>
-                      <a:tailEnd type="none" w="med" len="med"/>
-                    </a:lnB>
-                    <a:solidFill>
-                      <a:srgbClr val="E8EFF8"/>
-                    </a:solidFill>
-                  </a:tcPr>
-                </a:tc>
-                <a:tc>
-                  <a:txBody>
-                    <a:bodyPr/>
-                    <a:lstStyle/>
-                    <a:p>
-                      <a:pPr algn="ctr" indent="0" marL="0">
-                        <a:buNone/>
-                      </a:pPr>
-                      <a:r>
-                        <a:rPr lang="en-US" sz="900" dirty="0">
-                          <a:solidFill>
-                            <a:srgbClr val="334155"/>
-                          </a:solidFill>
-                          <a:latin typeface="Arial" pitchFamily="34" charset="0"/>
-                          <a:ea typeface="Arial" pitchFamily="34" charset="-122"/>
-                          <a:cs typeface="Arial" pitchFamily="34" charset="-120"/>
-                        </a:rPr>
-                        <a:t>2件</a:t>
+                        <a:t>1件</a:t>
                       </a:r>
                       <a:endParaRPr lang="en-US" sz="900" dirty="0">
                         <a:latin typeface="Arial" charset="0"/>
@@ -11476,7 +10888,7 @@
                           <a:ea typeface="Arial" pitchFamily="34" charset="-122"/>
                           <a:cs typeface="Arial" pitchFamily="34" charset="-120"/>
                         </a:rPr>
-                        <a:t>空調問題</a:t>
+                        <a:t>周辺飲食店の少なさ</a:t>
                       </a:r>
                       <a:endParaRPr lang="en-US" sz="900" dirty="0">
                         <a:latin typeface="Arial" charset="0"/>
@@ -11544,7 +10956,7 @@
                           <a:ea typeface="Arial" pitchFamily="34" charset="-122"/>
                           <a:cs typeface="Arial" pitchFamily="34" charset="-120"/>
                         </a:rPr>
-                        <a:t>エアコン効き悪い、温度調整困難</a:t>
+                        <a:t>「周辺にリーズナブルな飲食店がなく不便」という周辺環境への指摘</a:t>
                       </a:r>
                       <a:endParaRPr lang="en-US" sz="900" dirty="0">
                         <a:latin typeface="Arial" charset="0"/>
@@ -11592,280 +11004,6 @@
                     </a:lnB>
                     <a:solidFill>
                       <a:srgbClr val="FFFFFF"/>
-                    </a:solidFill>
-                  </a:tcPr>
-                </a:tc>
-                <a:tc>
-                  <a:txBody>
-                    <a:bodyPr/>
-                    <a:lstStyle/>
-                    <a:p>
-                      <a:pPr algn="ctr" indent="0" marL="0">
-                        <a:buNone/>
-                      </a:pPr>
-                      <a:r>
-                        <a:rPr lang="en-US" sz="900" dirty="0">
-                          <a:solidFill>
-                            <a:srgbClr val="334155"/>
-                          </a:solidFill>
-                          <a:latin typeface="Arial" pitchFamily="34" charset="0"/>
-                          <a:ea typeface="Arial" pitchFamily="34" charset="-122"/>
-                          <a:cs typeface="Arial" pitchFamily="34" charset="-120"/>
-                        </a:rPr>
-                        <a:t>2件</a:t>
-                      </a:r>
-                      <a:endParaRPr lang="en-US" sz="900" dirty="0">
-                        <a:latin typeface="Arial" charset="0"/>
-                        <a:ea typeface="Arial" charset="0"/>
-                        <a:cs typeface="Arial" charset="0"/>
-                      </a:endParaRPr>
-                    </a:p>
-                  </a:txBody>
-                  <a:tcPr marL="91440" marR="91440" marT="45720" marB="45720">
-                    <a:lnL w="6350" cap="flat" cmpd="sng" algn="ctr">
-                      <a:solidFill>
-                        <a:srgbClr val="CBD5E1"/>
-                      </a:solidFill>
-                      <a:prstDash val="solid"/>
-                      <a:round/>
-                      <a:headEnd type="none" w="med" len="med"/>
-                      <a:tailEnd type="none" w="med" len="med"/>
-                    </a:lnL>
-                    <a:lnR w="6350" cap="flat" cmpd="sng" algn="ctr">
-                      <a:solidFill>
-                        <a:srgbClr val="CBD5E1"/>
-                      </a:solidFill>
-                      <a:prstDash val="solid"/>
-                      <a:round/>
-                      <a:headEnd type="none" w="med" len="med"/>
-                      <a:tailEnd type="none" w="med" len="med"/>
-                    </a:lnR>
-                    <a:lnT w="6350" cap="flat" cmpd="sng" algn="ctr">
-                      <a:solidFill>
-                        <a:srgbClr val="CBD5E1"/>
-                      </a:solidFill>
-                      <a:prstDash val="solid"/>
-                      <a:round/>
-                      <a:headEnd type="none" w="med" len="med"/>
-                      <a:tailEnd type="none" w="med" len="med"/>
-                    </a:lnT>
-                    <a:lnB w="6350" cap="flat" cmpd="sng" algn="ctr">
-                      <a:solidFill>
-                        <a:srgbClr val="CBD5E1"/>
-                      </a:solidFill>
-                      <a:prstDash val="solid"/>
-                      <a:round/>
-                      <a:headEnd type="none" w="med" len="med"/>
-                      <a:tailEnd type="none" w="med" len="med"/>
-                    </a:lnB>
-                    <a:solidFill>
-                      <a:srgbClr val="FFFFFF"/>
-                    </a:solidFill>
-                  </a:tcPr>
-                </a:tc>
-              </a:tr>
-              <a:tr h="320040">
-                <a:tc>
-                  <a:txBody>
-                    <a:bodyPr/>
-                    <a:lstStyle/>
-                    <a:p>
-                      <a:pPr algn="ctr" indent="0" marL="0">
-                        <a:buNone/>
-                      </a:pPr>
-                      <a:r>
-                        <a:rPr lang="en-US" sz="1200" b="1" dirty="0">
-                          <a:solidFill>
-                            <a:srgbClr val="94A3B8"/>
-                          </a:solidFill>
-                          <a:latin typeface="Arial" pitchFamily="34" charset="0"/>
-                          <a:ea typeface="Arial" pitchFamily="34" charset="-122"/>
-                          <a:cs typeface="Arial" pitchFamily="34" charset="-120"/>
-                        </a:rPr>
-                        <a:t>C</a:t>
-                      </a:r>
-                      <a:endParaRPr lang="en-US" sz="1200" dirty="0">
-                        <a:latin typeface="Arial" charset="0"/>
-                        <a:ea typeface="Arial" charset="0"/>
-                        <a:cs typeface="Arial" charset="0"/>
-                      </a:endParaRPr>
-                    </a:p>
-                  </a:txBody>
-                  <a:tcPr marL="91440" marR="91440" marT="45720" marB="45720">
-                    <a:lnL w="6350" cap="flat" cmpd="sng" algn="ctr">
-                      <a:solidFill>
-                        <a:srgbClr val="CBD5E1"/>
-                      </a:solidFill>
-                      <a:prstDash val="solid"/>
-                      <a:round/>
-                      <a:headEnd type="none" w="med" len="med"/>
-                      <a:tailEnd type="none" w="med" len="med"/>
-                    </a:lnL>
-                    <a:lnR w="6350" cap="flat" cmpd="sng" algn="ctr">
-                      <a:solidFill>
-                        <a:srgbClr val="CBD5E1"/>
-                      </a:solidFill>
-                      <a:prstDash val="solid"/>
-                      <a:round/>
-                      <a:headEnd type="none" w="med" len="med"/>
-                      <a:tailEnd type="none" w="med" len="med"/>
-                    </a:lnR>
-                    <a:lnT w="6350" cap="flat" cmpd="sng" algn="ctr">
-                      <a:solidFill>
-                        <a:srgbClr val="CBD5E1"/>
-                      </a:solidFill>
-                      <a:prstDash val="solid"/>
-                      <a:round/>
-                      <a:headEnd type="none" w="med" len="med"/>
-                      <a:tailEnd type="none" w="med" len="med"/>
-                    </a:lnT>
-                    <a:lnB w="6350" cap="flat" cmpd="sng" algn="ctr">
-                      <a:solidFill>
-                        <a:srgbClr val="CBD5E1"/>
-                      </a:solidFill>
-                      <a:prstDash val="solid"/>
-                      <a:round/>
-                      <a:headEnd type="none" w="med" len="med"/>
-                      <a:tailEnd type="none" w="med" len="med"/>
-                    </a:lnB>
-                    <a:solidFill>
-                      <a:srgbClr val="E8EFF8"/>
-                    </a:solidFill>
-                  </a:tcPr>
-                </a:tc>
-                <a:tc>
-                  <a:txBody>
-                    <a:bodyPr/>
-                    <a:lstStyle/>
-                    <a:p>
-                      <a:pPr indent="0" marL="0">
-                        <a:buNone/>
-                      </a:pPr>
-                      <a:r>
-                        <a:rPr lang="en-US" sz="900" b="1" dirty="0">
-                          <a:solidFill>
-                            <a:srgbClr val="334155"/>
-                          </a:solidFill>
-                          <a:latin typeface="Arial" pitchFamily="34" charset="0"/>
-                          <a:ea typeface="Arial" pitchFamily="34" charset="-122"/>
-                          <a:cs typeface="Arial" pitchFamily="34" charset="-120"/>
-                        </a:rPr>
-                        <a:t>加湿器</a:t>
-                      </a:r>
-                      <a:endParaRPr lang="en-US" sz="900" dirty="0">
-                        <a:latin typeface="Arial" charset="0"/>
-                        <a:ea typeface="Arial" charset="0"/>
-                        <a:cs typeface="Arial" charset="0"/>
-                      </a:endParaRPr>
-                    </a:p>
-                  </a:txBody>
-                  <a:tcPr marL="91440" marR="91440" marT="45720" marB="45720">
-                    <a:lnL w="6350" cap="flat" cmpd="sng" algn="ctr">
-                      <a:solidFill>
-                        <a:srgbClr val="CBD5E1"/>
-                      </a:solidFill>
-                      <a:prstDash val="solid"/>
-                      <a:round/>
-                      <a:headEnd type="none" w="med" len="med"/>
-                      <a:tailEnd type="none" w="med" len="med"/>
-                    </a:lnL>
-                    <a:lnR w="6350" cap="flat" cmpd="sng" algn="ctr">
-                      <a:solidFill>
-                        <a:srgbClr val="CBD5E1"/>
-                      </a:solidFill>
-                      <a:prstDash val="solid"/>
-                      <a:round/>
-                      <a:headEnd type="none" w="med" len="med"/>
-                      <a:tailEnd type="none" w="med" len="med"/>
-                    </a:lnR>
-                    <a:lnT w="6350" cap="flat" cmpd="sng" algn="ctr">
-                      <a:solidFill>
-                        <a:srgbClr val="CBD5E1"/>
-                      </a:solidFill>
-                      <a:prstDash val="solid"/>
-                      <a:round/>
-                      <a:headEnd type="none" w="med" len="med"/>
-                      <a:tailEnd type="none" w="med" len="med"/>
-                    </a:lnT>
-                    <a:lnB w="6350" cap="flat" cmpd="sng" algn="ctr">
-                      <a:solidFill>
-                        <a:srgbClr val="CBD5E1"/>
-                      </a:solidFill>
-                      <a:prstDash val="solid"/>
-                      <a:round/>
-                      <a:headEnd type="none" w="med" len="med"/>
-                      <a:tailEnd type="none" w="med" len="med"/>
-                    </a:lnB>
-                    <a:solidFill>
-                      <a:srgbClr val="E8EFF8"/>
-                    </a:solidFill>
-                  </a:tcPr>
-                </a:tc>
-                <a:tc>
-                  <a:txBody>
-                    <a:bodyPr/>
-                    <a:lstStyle/>
-                    <a:p>
-                      <a:pPr indent="0" marL="0">
-                        <a:buNone/>
-                      </a:pPr>
-                      <a:r>
-                        <a:rPr lang="en-US" sz="900" dirty="0">
-                          <a:solidFill>
-                            <a:srgbClr val="64748B"/>
-                          </a:solidFill>
-                          <a:latin typeface="Arial" pitchFamily="34" charset="0"/>
-                          <a:ea typeface="Arial" pitchFamily="34" charset="-122"/>
-                          <a:cs typeface="Arial" pitchFamily="34" charset="-120"/>
-                        </a:rPr>
-                        <a:t>加湿器が古い/未設置</a:t>
-                      </a:r>
-                      <a:endParaRPr lang="en-US" sz="900" dirty="0">
-                        <a:latin typeface="Arial" charset="0"/>
-                        <a:ea typeface="Arial" charset="0"/>
-                        <a:cs typeface="Arial" charset="0"/>
-                      </a:endParaRPr>
-                    </a:p>
-                  </a:txBody>
-                  <a:tcPr marL="91440" marR="91440" marT="45720" marB="45720">
-                    <a:lnL w="6350" cap="flat" cmpd="sng" algn="ctr">
-                      <a:solidFill>
-                        <a:srgbClr val="CBD5E1"/>
-                      </a:solidFill>
-                      <a:prstDash val="solid"/>
-                      <a:round/>
-                      <a:headEnd type="none" w="med" len="med"/>
-                      <a:tailEnd type="none" w="med" len="med"/>
-                    </a:lnL>
-                    <a:lnR w="6350" cap="flat" cmpd="sng" algn="ctr">
-                      <a:solidFill>
-                        <a:srgbClr val="CBD5E1"/>
-                      </a:solidFill>
-                      <a:prstDash val="solid"/>
-                      <a:round/>
-                      <a:headEnd type="none" w="med" len="med"/>
-                      <a:tailEnd type="none" w="med" len="med"/>
-                    </a:lnR>
-                    <a:lnT w="6350" cap="flat" cmpd="sng" algn="ctr">
-                      <a:solidFill>
-                        <a:srgbClr val="CBD5E1"/>
-                      </a:solidFill>
-                      <a:prstDash val="solid"/>
-                      <a:round/>
-                      <a:headEnd type="none" w="med" len="med"/>
-                      <a:tailEnd type="none" w="med" len="med"/>
-                    </a:lnT>
-                    <a:lnB w="6350" cap="flat" cmpd="sng" algn="ctr">
-                      <a:solidFill>
-                        <a:srgbClr val="CBD5E1"/>
-                      </a:solidFill>
-                      <a:prstDash val="solid"/>
-                      <a:round/>
-                      <a:headEnd type="none" w="med" len="med"/>
-                      <a:tailEnd type="none" w="med" len="med"/>
-                    </a:lnB>
-                    <a:solidFill>
-                      <a:srgbClr val="E8EFF8"/>
                     </a:solidFill>
                   </a:tcPr>
                 </a:tc>
@@ -11933,7 +11071,7 @@
                       <a:tailEnd type="none" w="med" len="med"/>
                     </a:lnB>
                     <a:solidFill>
-                      <a:srgbClr val="E8EFF8"/>
+                      <a:srgbClr val="FFFFFF"/>
                     </a:solidFill>
                   </a:tcPr>
                 </a:tc>
@@ -12340,7 +11478,7 @@
                 <a:ea typeface="Arial" pitchFamily="34" charset="-122"/>
                 <a:cs typeface="Arial" pitchFamily="34" charset="-120"/>
               </a:rPr>
-              <a:t>投資を最小限に抑え、オペレーション改善で効果を目指す</a:t>
+              <a:t>投資不要・オペレーション改善で対応可能</a:t>
             </a:r>
             <a:endParaRPr lang="en-US" sz="1000" dirty="0"/>
           </a:p>
@@ -12426,7 +11564,7 @@
                 <a:ea typeface="Arial" pitchFamily="34" charset="-122"/>
                 <a:cs typeface="Arial" pitchFamily="34" charset="-120"/>
               </a:rPr>
-              <a:t>清掃品質の強化</a:t>
+              <a:t>設備不具合の緊急対応</a:t>
             </a:r>
             <a:endParaRPr lang="en-US" sz="1200" dirty="0"/>
           </a:p>
@@ -12469,7 +11607,7 @@
                 <a:ea typeface="Arial" pitchFamily="34" charset="-122"/>
                 <a:cs typeface="Arial" pitchFamily="34" charset="-120"/>
               </a:rPr>
-              <a:t>チェックリスト見直し（髪の毛・ほこり・水垢）</a:t>
+              <a:t>浴槽の穴・ヒビなど安全不備の即時修繕</a:t>
             </a:r>
             <a:endParaRPr lang="en-US" sz="900" dirty="0"/>
           </a:p>
@@ -12490,7 +11628,7 @@
                 <a:ea typeface="Arial" pitchFamily="34" charset="-122"/>
                 <a:cs typeface="Arial" pitchFamily="34" charset="-120"/>
               </a:rPr>
-              <a:t>ダブルチェック体制の導入</a:t>
+              <a:t>客室設備点検チェックリストの導入と月次実施</a:t>
             </a:r>
             <a:endParaRPr lang="en-US" sz="900" dirty="0"/>
           </a:p>
@@ -12511,7 +11649,7 @@
                 <a:ea typeface="Arial" pitchFamily="34" charset="-122"/>
                 <a:cs typeface="Arial" pitchFamily="34" charset="-120"/>
               </a:rPr>
-              <a:t>清掃後の換気30分以上確保</a:t>
+              <a:t>廊下カーペットの張り替え・固定</a:t>
             </a:r>
             <a:endParaRPr lang="en-US" sz="900" dirty="0"/>
           </a:p>
@@ -12532,7 +11670,7 @@
                 <a:ea typeface="Arial" pitchFamily="34" charset="-122"/>
                 <a:cs typeface="Arial" pitchFamily="34" charset="-120"/>
               </a:rPr>
-              <a:t>週次の抜き打ち品質チェック</a:t>
+              <a:t>ハウスダスト対策として空気清浄機の設置</a:t>
             </a:r>
             <a:endParaRPr lang="en-US" sz="900" dirty="0"/>
           </a:p>
@@ -12618,7 +11756,7 @@
                 <a:ea typeface="Arial" pitchFamily="34" charset="-122"/>
                 <a:cs typeface="Arial" pitchFamily="34" charset="-120"/>
               </a:rPr>
-              <a:t>騒音対策（即効性）</a:t>
+              <a:t>アクセス案内の改善</a:t>
             </a:r>
             <a:endParaRPr lang="en-US" sz="1200" dirty="0"/>
           </a:p>
@@ -12661,7 +11799,7 @@
                 <a:ea typeface="Arial" pitchFamily="34" charset="-122"/>
                 <a:cs typeface="Arial" pitchFamily="34" charset="-120"/>
               </a:rPr>
-              <a:t>ドア下部・窓際の簡易防音テープ設置</a:t>
+              <a:t>写真付き詳細道順マップをOTA・公式サイトに掲載</a:t>
             </a:r>
             <a:endParaRPr lang="en-US" sz="900" dirty="0"/>
           </a:p>
@@ -12682,7 +11820,7 @@
                 <a:ea typeface="Arial" pitchFamily="34" charset="-122"/>
                 <a:cs typeface="Arial" pitchFamily="34" charset="-120"/>
               </a:rPr>
-              <a:t>耳栓のアメニティ提供を検討</a:t>
+              <a:t>各最寄駅からの案内看板の設置</a:t>
             </a:r>
             <a:endParaRPr lang="en-US" sz="900" dirty="0"/>
           </a:p>
@@ -12703,10 +11841,118 @@
                 <a:ea typeface="Arial" pitchFamily="34" charset="-122"/>
                 <a:cs typeface="Arial" pitchFamily="34" charset="-120"/>
               </a:rPr>
-              <a:t>静かな客室の優先割当てオペレーション</a:t>
+              <a:t>チェックイン前のアクセス案内メール自動送信</a:t>
             </a:r>
             <a:endParaRPr lang="en-US" sz="900" dirty="0"/>
           </a:p>
+        </p:txBody>
+      </p:sp>
+      <p:sp>
+        <p:nvSpPr>
+          <p:cNvPr id="14" name="Shape 12"/>
+          <p:cNvSpPr/>
+          <p:nvPr/>
+        </p:nvSpPr>
+        <p:spPr>
+          <a:xfrm>
+            <a:off x="457200" y="3017520"/>
+            <a:ext cx="3977640" cy="1600200"/>
+          </a:xfrm>
+          <a:prstGeom prst="rect">
+            <a:avLst/>
+          </a:prstGeom>
+          <a:solidFill>
+            <a:srgbClr val="FFFFFF"/>
+          </a:solidFill>
+          <a:ln/>
+          <a:effectLst>
+            <a:outerShdw sx="100000" sy="100000" kx="0" ky="0" algn="bl" rotWithShape="0" blurRad="50800" dist="25400" dir="8100000">
+              <a:srgbClr val="000000">
+                <a:alpha val="10000"/>
+              </a:srgbClr>
+            </a:outerShdw>
+          </a:effectLst>
+        </p:spPr>
+      </p:sp>
+      <p:sp>
+        <p:nvSpPr>
+          <p:cNvPr id="15" name="Shape 13"/>
+          <p:cNvSpPr/>
+          <p:nvPr/>
+        </p:nvSpPr>
+        <p:spPr>
+          <a:xfrm>
+            <a:off x="457200" y="3017520"/>
+            <a:ext cx="54864" cy="1600200"/>
+          </a:xfrm>
+          <a:prstGeom prst="rect">
+            <a:avLst/>
+          </a:prstGeom>
+          <a:solidFill>
+            <a:srgbClr val="3B7DD8"/>
+          </a:solidFill>
+          <a:ln/>
+        </p:spPr>
+      </p:sp>
+      <p:sp>
+        <p:nvSpPr>
+          <p:cNvPr id="16" name="Text 14"/>
+          <p:cNvSpPr/>
+          <p:nvPr/>
+        </p:nvSpPr>
+        <p:spPr>
+          <a:xfrm>
+            <a:off x="594360" y="3063240"/>
+            <a:ext cx="3657600" cy="320040"/>
+          </a:xfrm>
+          <a:prstGeom prst="rect">
+            <a:avLst/>
+          </a:prstGeom>
+          <a:noFill/>
+          <a:ln/>
+        </p:spPr>
+        <p:txBody>
+          <a:bodyPr wrap="square" lIns="0" tIns="0" rIns="0" bIns="0" rtlCol="0" anchor="ctr"/>
+          <a:lstStyle/>
+          <a:p>
+            <a:pPr indent="0" marL="0">
+              <a:buNone/>
+            </a:pPr>
+            <a:r>
+              <a:rPr lang="en-US" sz="1200" b="1" dirty="0">
+                <a:solidFill>
+                  <a:srgbClr val="1A2744"/>
+                </a:solidFill>
+                <a:latin typeface="Arial" pitchFamily="34" charset="0"/>
+                <a:ea typeface="Arial" pitchFamily="34" charset="-122"/>
+                <a:cs typeface="Arial" pitchFamily="34" charset="-120"/>
+              </a:rPr>
+              <a:t>騒音への暫定対策</a:t>
+            </a:r>
+            <a:endParaRPr lang="en-US" sz="1200" dirty="0"/>
+          </a:p>
+        </p:txBody>
+      </p:sp>
+      <p:sp>
+        <p:nvSpPr>
+          <p:cNvPr id="17" name="Text 15"/>
+          <p:cNvSpPr/>
+          <p:nvPr/>
+        </p:nvSpPr>
+        <p:spPr>
+          <a:xfrm>
+            <a:off x="594360" y="3383280"/>
+            <a:ext cx="3657600" cy="1188720"/>
+          </a:xfrm>
+          <a:prstGeom prst="rect">
+            <a:avLst/>
+          </a:prstGeom>
+          <a:noFill/>
+          <a:ln/>
+        </p:spPr>
+        <p:txBody>
+          <a:bodyPr wrap="square" lIns="0" tIns="0" rIns="0" bIns="0" rtlCol="0" anchor="ctr"/>
+          <a:lstStyle/>
           <a:p>
             <a:pPr marL="342900" indent="-342900">
               <a:spcAft>
@@ -12724,21 +11970,63 @@
                 <a:ea typeface="Arial" pitchFamily="34" charset="-122"/>
                 <a:cs typeface="Arial" pitchFamily="34" charset="-120"/>
               </a:rPr>
-              <a:t>チェックイン時の希望確認</a:t>
+              <a:t>線路側客室のOTA掲載での事前告知</a:t>
             </a:r>
             <a:endParaRPr lang="en-US" sz="900" dirty="0"/>
           </a:p>
+          <a:p>
+            <a:pPr marL="342900" indent="-342900">
+              <a:spcAft>
+                <a:spcPts val="300"/>
+              </a:spcAft>
+              <a:buSzPct val="100000"/>
+              <a:buChar char="•"/>
+            </a:pPr>
+            <a:r>
+              <a:rPr lang="en-US" sz="900" dirty="0">
+                <a:solidFill>
+                  <a:srgbClr val="334155"/>
+                </a:solidFill>
+                <a:latin typeface="Arial" pitchFamily="34" charset="0"/>
+                <a:ea typeface="Arial" pitchFamily="34" charset="-122"/>
+                <a:cs typeface="Arial" pitchFamily="34" charset="-120"/>
+              </a:rPr>
+              <a:t>耳栓・防音グッズのフロント無料貸出</a:t>
+            </a:r>
+            <a:endParaRPr lang="en-US" sz="900" dirty="0"/>
+          </a:p>
+          <a:p>
+            <a:pPr marL="342900" indent="-342900">
+              <a:spcAft>
+                <a:spcPts val="300"/>
+              </a:spcAft>
+              <a:buSzPct val="100000"/>
+              <a:buChar char="•"/>
+            </a:pPr>
+            <a:r>
+              <a:rPr lang="en-US" sz="900" dirty="0">
+                <a:solidFill>
+                  <a:srgbClr val="334155"/>
+                </a:solidFill>
+                <a:latin typeface="Arial" pitchFamily="34" charset="0"/>
+                <a:ea typeface="Arial" pitchFamily="34" charset="-122"/>
+                <a:cs typeface="Arial" pitchFamily="34" charset="-120"/>
+              </a:rPr>
+              <a:t>騒音懸念ゲストへの反線路側客室の優先アサイン</a:t>
+            </a:r>
+            <a:endParaRPr lang="en-US" sz="900" dirty="0"/>
+          </a:p>
         </p:txBody>
       </p:sp>
       <p:sp>
         <p:nvSpPr>
-          <p:cNvPr id="14" name="Shape 12"/>
-          <p:cNvSpPr/>
-          <p:nvPr/>
-        </p:nvSpPr>
-        <p:spPr>
-          <a:xfrm>
-            <a:off x="457200" y="3017520"/>
+          <p:cNvPr id="18" name="Shape 16"/>
+          <p:cNvSpPr/>
+          <p:nvPr/>
+        </p:nvSpPr>
+        <p:spPr>
+          <a:xfrm>
+            <a:off x="4663440" y="3017520"/>
             <a:ext cx="3977640" cy="1600200"/>
           </a:xfrm>
           <a:prstGeom prst="rect">
@@ -12759,13 +12047,13 @@
       </p:sp>
       <p:sp>
         <p:nvSpPr>
-          <p:cNvPr id="15" name="Shape 13"/>
-          <p:cNvSpPr/>
-          <p:nvPr/>
-        </p:nvSpPr>
-        <p:spPr>
-          <a:xfrm>
-            <a:off x="457200" y="3017520"/>
+          <p:cNvPr id="19" name="Shape 17"/>
+          <p:cNvSpPr/>
+          <p:nvPr/>
+        </p:nvSpPr>
+        <p:spPr>
+          <a:xfrm>
+            <a:off x="4663440" y="3017520"/>
             <a:ext cx="54864" cy="1600200"/>
           </a:xfrm>
           <a:prstGeom prst="rect">
@@ -12779,13 +12067,13 @@
       </p:sp>
       <p:sp>
         <p:nvSpPr>
-          <p:cNvPr id="16" name="Text 14"/>
-          <p:cNvSpPr/>
-          <p:nvPr/>
-        </p:nvSpPr>
-        <p:spPr>
-          <a:xfrm>
-            <a:off x="594360" y="3063240"/>
+          <p:cNvPr id="20" name="Text 18"/>
+          <p:cNvSpPr/>
+          <p:nvPr/>
+        </p:nvSpPr>
+        <p:spPr>
+          <a:xfrm>
+            <a:off x="4800600" y="3063240"/>
             <a:ext cx="3657600" cy="320040"/>
           </a:xfrm>
           <a:prstGeom prst="rect">
@@ -12810,7 +12098,7 @@
                 <a:ea typeface="Arial" pitchFamily="34" charset="-122"/>
                 <a:cs typeface="Arial" pitchFamily="34" charset="-120"/>
               </a:rPr>
-              <a:t>タバコ臭・匂い対策</a:t>
+              <a:t>口コミ返信体制の整備</a:t>
             </a:r>
             <a:endParaRPr lang="en-US" sz="1200" dirty="0"/>
           </a:p>
@@ -12818,13 +12106,13 @@
       </p:sp>
       <p:sp>
         <p:nvSpPr>
-          <p:cNvPr id="17" name="Text 15"/>
-          <p:cNvSpPr/>
-          <p:nvPr/>
-        </p:nvSpPr>
-        <p:spPr>
-          <a:xfrm>
-            <a:off x="594360" y="3383280"/>
+          <p:cNvPr id="21" name="Text 19"/>
+          <p:cNvSpPr/>
+          <p:nvPr/>
+        </p:nvSpPr>
+        <p:spPr>
+          <a:xfrm>
+            <a:off x="4800600" y="3383280"/>
             <a:ext cx="3657600" cy="1188720"/>
           </a:xfrm>
           <a:prstGeom prst="rect">
@@ -12853,7 +12141,7 @@
                 <a:ea typeface="Arial" pitchFamily="34" charset="-122"/>
                 <a:cs typeface="Arial" pitchFamily="34" charset="-120"/>
               </a:rPr>
-              <a:t>禁煙室のオゾン脱臭を月2回実施</a:t>
+              <a:t>全サイト48時間以内返信ルール化</a:t>
             </a:r>
             <a:endParaRPr lang="en-US" sz="900" dirty="0"/>
           </a:p>
@@ -12874,7 +12162,7 @@
                 <a:ea typeface="Arial" pitchFamily="34" charset="-122"/>
                 <a:cs typeface="Arial" pitchFamily="34" charset="-120"/>
               </a:rPr>
-              <a:t>カーペット・カーテンへの消臭処理</a:t>
+              <a:t>設備改善計画をネガティブ口コミへの返信に明記</a:t>
             </a:r>
             <a:endParaRPr lang="en-US" sz="900" dirty="0"/>
           </a:p>
@@ -12895,199 +12183,7 @@
                 <a:ea typeface="Arial" pitchFamily="34" charset="-122"/>
                 <a:cs typeface="Arial" pitchFamily="34" charset="-120"/>
               </a:rPr>
-              <a:t>水回りメンテナンス頻度の向上</a:t>
-            </a:r>
-            <a:endParaRPr lang="en-US" sz="900" dirty="0"/>
-          </a:p>
-        </p:txBody>
-      </p:sp>
-      <p:sp>
-        <p:nvSpPr>
-          <p:cNvPr id="18" name="Shape 16"/>
-          <p:cNvSpPr/>
-          <p:nvPr/>
-        </p:nvSpPr>
-        <p:spPr>
-          <a:xfrm>
-            <a:off x="4663440" y="3017520"/>
-            <a:ext cx="3977640" cy="1600200"/>
-          </a:xfrm>
-          <a:prstGeom prst="rect">
-            <a:avLst/>
-          </a:prstGeom>
-          <a:solidFill>
-            <a:srgbClr val="FFFFFF"/>
-          </a:solidFill>
-          <a:ln/>
-          <a:effectLst>
-            <a:outerShdw sx="100000" sy="100000" kx="0" ky="0" algn="bl" rotWithShape="0" blurRad="50800" dist="25400" dir="8100000">
-              <a:srgbClr val="000000">
-                <a:alpha val="10000"/>
-              </a:srgbClr>
-            </a:outerShdw>
-          </a:effectLst>
-        </p:spPr>
-      </p:sp>
-      <p:sp>
-        <p:nvSpPr>
-          <p:cNvPr id="19" name="Shape 17"/>
-          <p:cNvSpPr/>
-          <p:nvPr/>
-        </p:nvSpPr>
-        <p:spPr>
-          <a:xfrm>
-            <a:off x="4663440" y="3017520"/>
-            <a:ext cx="54864" cy="1600200"/>
-          </a:xfrm>
-          <a:prstGeom prst="rect">
-            <a:avLst/>
-          </a:prstGeom>
-          <a:solidFill>
-            <a:srgbClr val="3B7DD8"/>
-          </a:solidFill>
-          <a:ln/>
-        </p:spPr>
-      </p:sp>
-      <p:sp>
-        <p:nvSpPr>
-          <p:cNvPr id="20" name="Text 18"/>
-          <p:cNvSpPr/>
-          <p:nvPr/>
-        </p:nvSpPr>
-        <p:spPr>
-          <a:xfrm>
-            <a:off x="4800600" y="3063240"/>
-            <a:ext cx="3657600" cy="320040"/>
-          </a:xfrm>
-          <a:prstGeom prst="rect">
-            <a:avLst/>
-          </a:prstGeom>
-          <a:noFill/>
-          <a:ln/>
-        </p:spPr>
-        <p:txBody>
-          <a:bodyPr wrap="square" lIns="0" tIns="0" rIns="0" bIns="0" rtlCol="0" anchor="ctr"/>
-          <a:lstStyle/>
-          <a:p>
-            <a:pPr indent="0" marL="0">
-              <a:buNone/>
-            </a:pPr>
-            <a:r>
-              <a:rPr lang="en-US" sz="1200" b="1" dirty="0">
-                <a:solidFill>
-                  <a:srgbClr val="1A2744"/>
-                </a:solidFill>
-                <a:latin typeface="Arial" pitchFamily="34" charset="0"/>
-                <a:ea typeface="Arial" pitchFamily="34" charset="-122"/>
-                <a:cs typeface="Arial" pitchFamily="34" charset="-120"/>
-              </a:rPr>
-              <a:t>口コミ返信開始</a:t>
-            </a:r>
-            <a:endParaRPr lang="en-US" sz="1200" dirty="0"/>
-          </a:p>
-        </p:txBody>
-      </p:sp>
-      <p:sp>
-        <p:nvSpPr>
-          <p:cNvPr id="21" name="Text 19"/>
-          <p:cNvSpPr/>
-          <p:nvPr/>
-        </p:nvSpPr>
-        <p:spPr>
-          <a:xfrm>
-            <a:off x="4800600" y="3383280"/>
-            <a:ext cx="3657600" cy="1188720"/>
-          </a:xfrm>
-          <a:prstGeom prst="rect">
-            <a:avLst/>
-          </a:prstGeom>
-          <a:noFill/>
-          <a:ln/>
-        </p:spPr>
-        <p:txBody>
-          <a:bodyPr wrap="square" lIns="0" tIns="0" rIns="0" bIns="0" rtlCol="0" anchor="ctr"/>
-          <a:lstStyle/>
-          <a:p>
-            <a:pPr marL="342900" indent="-342900">
-              <a:spcAft>
-                <a:spcPts val="300"/>
-              </a:spcAft>
-              <a:buSzPct val="100000"/>
-              <a:buChar char="•"/>
-            </a:pPr>
-            <a:r>
-              <a:rPr lang="en-US" sz="900" dirty="0">
-                <a:solidFill>
-                  <a:srgbClr val="334155"/>
-                </a:solidFill>
-                <a:latin typeface="Arial" pitchFamily="34" charset="0"/>
-                <a:ea typeface="Arial" pitchFamily="34" charset="-122"/>
-                <a:cs typeface="Arial" pitchFamily="34" charset="-120"/>
-              </a:rPr>
-              <a:t>全サイト48時間以内の返信体制構築</a:t>
-            </a:r>
-            <a:endParaRPr lang="en-US" sz="900" dirty="0"/>
-          </a:p>
-          <a:p>
-            <a:pPr marL="342900" indent="-342900">
-              <a:spcAft>
-                <a:spcPts val="300"/>
-              </a:spcAft>
-              <a:buSzPct val="100000"/>
-              <a:buChar char="•"/>
-            </a:pPr>
-            <a:r>
-              <a:rPr lang="en-US" sz="900" dirty="0">
-                <a:solidFill>
-                  <a:srgbClr val="334155"/>
-                </a:solidFill>
-                <a:latin typeface="Arial" pitchFamily="34" charset="0"/>
-                <a:ea typeface="Arial" pitchFamily="34" charset="-122"/>
-                <a:cs typeface="Arial" pitchFamily="34" charset="-120"/>
-              </a:rPr>
-              <a:t>低評価には謝罪＋具体的改善策を記載</a:t>
-            </a:r>
-            <a:endParaRPr lang="en-US" sz="900" dirty="0"/>
-          </a:p>
-          <a:p>
-            <a:pPr marL="342900" indent="-342900">
-              <a:spcAft>
-                <a:spcPts val="300"/>
-              </a:spcAft>
-              <a:buSzPct val="100000"/>
-              <a:buChar char="•"/>
-            </a:pPr>
-            <a:r>
-              <a:rPr lang="en-US" sz="900" dirty="0">
-                <a:solidFill>
-                  <a:srgbClr val="334155"/>
-                </a:solidFill>
-                <a:latin typeface="Arial" pitchFamily="34" charset="0"/>
-                <a:ea typeface="Arial" pitchFamily="34" charset="-122"/>
-                <a:cs typeface="Arial" pitchFamily="34" charset="-120"/>
-              </a:rPr>
-              <a:t>Google口コミを最優先で対応（3.08/5）</a:t>
-            </a:r>
-            <a:endParaRPr lang="en-US" sz="900" dirty="0"/>
-          </a:p>
-          <a:p>
-            <a:pPr marL="342900" indent="-342900">
-              <a:spcAft>
-                <a:spcPts val="300"/>
-              </a:spcAft>
-              <a:buSzPct val="100000"/>
-              <a:buChar char="•"/>
-            </a:pPr>
-            <a:r>
-              <a:rPr lang="en-US" sz="900" dirty="0">
-                <a:solidFill>
-                  <a:srgbClr val="334155"/>
-                </a:solidFill>
-                <a:latin typeface="Arial" pitchFamily="34" charset="0"/>
-                <a:ea typeface="Arial" pitchFamily="34" charset="-122"/>
-                <a:cs typeface="Arial" pitchFamily="34" charset="-120"/>
-              </a:rPr>
-              <a:t>高評価にも感謝メッセージ返信</a:t>
+              <a:t>Google・じゃらんへの重点返信対応</a:t>
             </a:r>
             <a:endParaRPr lang="en-US" sz="900" dirty="0"/>
           </a:p>
@@ -13440,7 +12536,7 @@
                 <a:ea typeface="Arial" pitchFamily="34" charset="-122"/>
                 <a:cs typeface="Arial" pitchFamily="34" charset="-120"/>
               </a:rPr>
-              <a:t>客室リフレッシュ（部分改修）</a:t>
+              <a:t>客室防音対策</a:t>
             </a:r>
             <a:endParaRPr lang="en-US" sz="1000" dirty="0"/>
           </a:p>
@@ -13483,7 +12579,7 @@
                 <a:ea typeface="Arial" pitchFamily="34" charset="-122"/>
                 <a:cs typeface="Arial" pitchFamily="34" charset="-120"/>
               </a:rPr>
-              <a:t>壁紙・カーペット交換（優先フロアから）</a:t>
+              <a:t>防音カーテン・二重窓の設置（線路側客室優先）</a:t>
             </a:r>
             <a:endParaRPr lang="en-US" sz="900" dirty="0"/>
           </a:p>
@@ -13504,7 +12600,7 @@
                 <a:ea typeface="Arial" pitchFamily="34" charset="-122"/>
                 <a:cs typeface="Arial" pitchFamily="34" charset="-120"/>
               </a:rPr>
-              <a:t>照明のLED化で清潔感演出</a:t>
+              <a:t>ドア・窓の隙間テープによる防音強化</a:t>
             </a:r>
             <a:endParaRPr lang="en-US" sz="900" dirty="0"/>
           </a:p>
@@ -13525,7 +12621,7 @@
                 <a:ea typeface="Arial" pitchFamily="34" charset="-122"/>
                 <a:cs typeface="Arial" pitchFamily="34" charset="-120"/>
               </a:rPr>
-              <a:t>小物の新品交換</a:t>
+              <a:t>加湿器の客室常備（乾燥対策）</a:t>
             </a:r>
             <a:endParaRPr lang="en-US" sz="900" dirty="0"/>
           </a:p>
@@ -13564,7 +12660,7 @@
                 <a:ea typeface="Arial" pitchFamily="34" charset="-122"/>
                 <a:cs typeface="Arial" pitchFamily="34" charset="-120"/>
               </a:rPr>
-              <a:t>OTA対策の強化</a:t>
+              <a:t>客室・共用部の段階的リニューアル</a:t>
             </a:r>
             <a:endParaRPr lang="en-US" sz="1000" dirty="0"/>
           </a:p>
@@ -13607,7 +12703,7 @@
                 <a:ea typeface="Arial" pitchFamily="34" charset="-122"/>
                 <a:cs typeface="Arial" pitchFamily="34" charset="-120"/>
               </a:rPr>
-              <a:t>施設写真の刷新（プロ撮影）</a:t>
+              <a:t>壁紙・カーペットの張り替えによる清潔感向上</a:t>
             </a:r>
             <a:endParaRPr lang="en-US" sz="900" dirty="0"/>
           </a:p>
@@ -13628,7 +12724,7 @@
                 <a:ea typeface="Arial" pitchFamily="34" charset="-122"/>
                 <a:cs typeface="Arial" pitchFamily="34" charset="-120"/>
               </a:rPr>
-              <a:t>Googleビジネスプロフィール最新化</a:t>
+              <a:t>浴室設備のアップグレード（シャワーヘッド・水栓）</a:t>
             </a:r>
             <a:endParaRPr lang="en-US" sz="900" dirty="0"/>
           </a:p>
@@ -13649,7 +12745,7 @@
                 <a:ea typeface="Arial" pitchFamily="34" charset="-122"/>
                 <a:cs typeface="Arial" pitchFamily="34" charset="-120"/>
               </a:rPr>
-              <a:t>朝食の魅力をOTAでアピール</a:t>
+              <a:t>照明のLED化による明るさ・清潔感の向上</a:t>
             </a:r>
             <a:endParaRPr lang="en-US" sz="900" dirty="0"/>
           </a:p>
@@ -13688,7 +12784,7 @@
                 <a:ea typeface="Arial" pitchFamily="34" charset="-122"/>
                 <a:cs typeface="Arial" pitchFamily="34" charset="-120"/>
               </a:rPr>
-              <a:t>アクセス・空調改善</a:t>
+              <a:t>朝食メニューの改善</a:t>
             </a:r>
             <a:endParaRPr lang="en-US" sz="1000" dirty="0"/>
           </a:p>
@@ -13703,7 +12799,7 @@
         <p:spPr>
           <a:xfrm>
             <a:off x="640080" y="3803904"/>
-            <a:ext cx="3474720" cy="694944"/>
+            <a:ext cx="3474720" cy="493776"/>
           </a:xfrm>
           <a:prstGeom prst="rect">
             <a:avLst/>
@@ -13731,7 +12827,7 @@
                 <a:ea typeface="Arial" pitchFamily="34" charset="-122"/>
                 <a:cs typeface="Arial" pitchFamily="34" charset="-120"/>
               </a:rPr>
-              <a:t>写真付きアクセスガイド作成</a:t>
+              <a:t>おかずの種類と質の向上</a:t>
             </a:r>
             <a:endParaRPr lang="en-US" sz="900" dirty="0"/>
           </a:p>
@@ -13752,28 +12848,7 @@
                 <a:ea typeface="Arial" pitchFamily="34" charset="-122"/>
                 <a:cs typeface="Arial" pitchFamily="34" charset="-120"/>
               </a:rPr>
-              <a:t>エアコンフィルター定期清掃厳格化</a:t>
-            </a:r>
-            <a:endParaRPr lang="en-US" sz="900" dirty="0"/>
-          </a:p>
-          <a:p>
-            <a:pPr marL="342900" indent="-342900">
-              <a:spcAft>
-                <a:spcPts val="200"/>
-              </a:spcAft>
-              <a:buSzPct val="100000"/>
-              <a:buChar char="•"/>
-            </a:pPr>
-            <a:r>
-              <a:rPr lang="en-US" sz="900" dirty="0">
-                <a:solidFill>
-                  <a:srgbClr val="64748B"/>
-                </a:solidFill>
-                <a:latin typeface="Arial" pitchFamily="34" charset="0"/>
-                <a:ea typeface="Arial" pitchFamily="34" charset="-122"/>
-                <a:cs typeface="Arial" pitchFamily="34" charset="-120"/>
-              </a:rPr>
-              <a:t>冬季の全室加湿器設置</a:t>
+              <a:t>季節メニューの定期的な見直し</a:t>
             </a:r>
             <a:endParaRPr lang="en-US" sz="900" dirty="0"/>
           </a:p>
@@ -13898,7 +12973,7 @@
                 <a:ea typeface="Arial" pitchFamily="34" charset="-122"/>
                 <a:cs typeface="Arial" pitchFamily="34" charset="-120"/>
               </a:rPr>
-              <a:t>防音工事</a:t>
+              <a:t>全客室の本格リノベーション</a:t>
             </a:r>
             <a:endParaRPr lang="en-US" sz="1000" dirty="0"/>
           </a:p>
@@ -13913,7 +12988,7 @@
         <p:spPr>
           <a:xfrm>
             <a:off x="4892040" y="1719072"/>
-            <a:ext cx="3474720" cy="896112"/>
+            <a:ext cx="3474720" cy="694944"/>
           </a:xfrm>
           <a:prstGeom prst="rect">
             <a:avLst/>
@@ -13941,7 +13016,7 @@
                 <a:ea typeface="Arial" pitchFamily="34" charset="-122"/>
                 <a:cs typeface="Arial" pitchFamily="34" charset="-120"/>
               </a:rPr>
-              <a:t>低評価集中フロアの防音調査・改修</a:t>
+              <a:t>客室全体の内装一新（床・壁・浴室・家具）</a:t>
             </a:r>
             <a:endParaRPr lang="en-US" sz="900" dirty="0"/>
           </a:p>
@@ -13962,7 +13037,7 @@
                 <a:ea typeface="Arial" pitchFamily="34" charset="-122"/>
                 <a:cs typeface="Arial" pitchFamily="34" charset="-120"/>
               </a:rPr>
-              <a:t>窓の二重サッシ化（外部騒音対策）</a:t>
+              <a:t>空調設備のアップグレード（温度・乾燥問題の解消）</a:t>
             </a:r>
             <a:endParaRPr lang="en-US" sz="900" dirty="0"/>
           </a:p>
@@ -13983,10 +13058,71 @@
                 <a:ea typeface="Arial" pitchFamily="34" charset="-122"/>
                 <a:cs typeface="Arial" pitchFamily="34" charset="-120"/>
               </a:rPr>
-              <a:t>壁面の遮音材追加</a:t>
+              <a:t>高性能空気清浄機の全室設置</a:t>
             </a:r>
             <a:endParaRPr lang="en-US" sz="900" dirty="0"/>
           </a:p>
+        </p:txBody>
+      </p:sp>
+      <p:sp>
+        <p:nvSpPr>
+          <p:cNvPr id="19" name="Text 17"/>
+          <p:cNvSpPr/>
+          <p:nvPr/>
+        </p:nvSpPr>
+        <p:spPr>
+          <a:xfrm>
+            <a:off x="4892040" y="2505456"/>
+            <a:ext cx="3474720" cy="274320"/>
+          </a:xfrm>
+          <a:prstGeom prst="rect">
+            <a:avLst/>
+          </a:prstGeom>
+          <a:noFill/>
+          <a:ln/>
+        </p:spPr>
+        <p:txBody>
+          <a:bodyPr wrap="square" lIns="0" tIns="0" rIns="0" bIns="0" rtlCol="0" anchor="ctr"/>
+          <a:lstStyle/>
+          <a:p>
+            <a:pPr indent="0" marL="0">
+              <a:buNone/>
+            </a:pPr>
+            <a:r>
+              <a:rPr lang="en-US" sz="1000" b="1" dirty="0">
+                <a:solidFill>
+                  <a:srgbClr val="1A2744"/>
+                </a:solidFill>
+                <a:latin typeface="Arial" pitchFamily="34" charset="0"/>
+                <a:ea typeface="Arial" pitchFamily="34" charset="-122"/>
+                <a:cs typeface="Arial" pitchFamily="34" charset="-120"/>
+              </a:rPr>
+              <a:t>外壁・構造の防音改修</a:t>
+            </a:r>
+            <a:endParaRPr lang="en-US" sz="1000" dirty="0"/>
+          </a:p>
+        </p:txBody>
+      </p:sp>
+      <p:sp>
+        <p:nvSpPr>
+          <p:cNvPr id="20" name="Text 18"/>
+          <p:cNvSpPr/>
+          <p:nvPr/>
+        </p:nvSpPr>
+        <p:spPr>
+          <a:xfrm>
+            <a:off x="4892040" y="2761488"/>
+            <a:ext cx="3474720" cy="493776"/>
+          </a:xfrm>
+          <a:prstGeom prst="rect">
+            <a:avLst/>
+          </a:prstGeom>
+          <a:noFill/>
+          <a:ln/>
+        </p:spPr>
+        <p:txBody>
+          <a:bodyPr wrap="square" lIns="0" tIns="0" rIns="0" bIns="0" rtlCol="0" anchor="ctr"/>
+          <a:lstStyle/>
           <a:p>
             <a:pPr marL="342900" indent="-342900">
               <a:spcAft>
@@ -14004,21 +13140,42 @@
                 <a:ea typeface="Arial" pitchFamily="34" charset="-122"/>
                 <a:cs typeface="Arial" pitchFamily="34" charset="-120"/>
               </a:rPr>
-              <a:t>ドア・窓の気密性向上工事</a:t>
+              <a:t>線路側客室の外壁防音材の施工</a:t>
             </a:r>
             <a:endParaRPr lang="en-US" sz="900" dirty="0"/>
           </a:p>
+          <a:p>
+            <a:pPr marL="342900" indent="-342900">
+              <a:spcAft>
+                <a:spcPts val="200"/>
+              </a:spcAft>
+              <a:buSzPct val="100000"/>
+              <a:buChar char="•"/>
+            </a:pPr>
+            <a:r>
+              <a:rPr lang="en-US" sz="900" dirty="0">
+                <a:solidFill>
+                  <a:srgbClr val="64748B"/>
+                </a:solidFill>
+                <a:latin typeface="Arial" pitchFamily="34" charset="0"/>
+                <a:ea typeface="Arial" pitchFamily="34" charset="-122"/>
+                <a:cs typeface="Arial" pitchFamily="34" charset="-120"/>
+              </a:rPr>
+              <a:t>二重サッシへの全面的な交換</a:t>
+            </a:r>
+            <a:endParaRPr lang="en-US" sz="900" dirty="0"/>
+          </a:p>
         </p:txBody>
       </p:sp>
       <p:sp>
         <p:nvSpPr>
-          <p:cNvPr id="19" name="Text 17"/>
-          <p:cNvSpPr/>
-          <p:nvPr/>
-        </p:nvSpPr>
-        <p:spPr>
-          <a:xfrm>
-            <a:off x="4892040" y="2706624"/>
+          <p:cNvPr id="21" name="Text 19"/>
+          <p:cNvSpPr/>
+          <p:nvPr/>
+        </p:nvSpPr>
+        <p:spPr>
+          <a:xfrm>
+            <a:off x="4892040" y="3346704"/>
             <a:ext cx="3474720" cy="274320"/>
           </a:xfrm>
           <a:prstGeom prst="rect">
@@ -14043,7 +13200,7 @@
                 <a:ea typeface="Arial" pitchFamily="34" charset="-122"/>
                 <a:cs typeface="Arial" pitchFamily="34" charset="-120"/>
               </a:rPr>
-              <a:t>水回りリニューアル</a:t>
+              <a:t>共用エリアのリノベーション</a:t>
             </a:r>
             <a:endParaRPr lang="en-US" sz="1000" dirty="0"/>
           </a:p>
@@ -14051,14 +13208,14 @@
       </p:sp>
       <p:sp>
         <p:nvSpPr>
-          <p:cNvPr id="20" name="Text 18"/>
-          <p:cNvSpPr/>
-          <p:nvPr/>
-        </p:nvSpPr>
-        <p:spPr>
-          <a:xfrm>
-            <a:off x="4892040" y="2962656"/>
-            <a:ext cx="3474720" cy="694944"/>
+          <p:cNvPr id="22" name="Text 20"/>
+          <p:cNvSpPr/>
+          <p:nvPr/>
+        </p:nvSpPr>
+        <p:spPr>
+          <a:xfrm>
+            <a:off x="4892040" y="3602736"/>
+            <a:ext cx="3474720" cy="493776"/>
           </a:xfrm>
           <a:prstGeom prst="rect">
             <a:avLst/>
@@ -14086,7 +13243,7 @@
                 <a:ea typeface="Arial" pitchFamily="34" charset="-122"/>
                 <a:cs typeface="Arial" pitchFamily="34" charset="-120"/>
               </a:rPr>
-              <a:t>水圧改善のための給水設備更新</a:t>
+              <a:t>フロント・エントランスの近代化</a:t>
             </a:r>
             <a:endParaRPr lang="en-US" sz="900" dirty="0"/>
           </a:p>
@@ -14107,152 +13264,7 @@
                 <a:ea typeface="Arial" pitchFamily="34" charset="-122"/>
                 <a:cs typeface="Arial" pitchFamily="34" charset="-120"/>
               </a:rPr>
-              <a:t>バスルーム内装の改修</a:t>
-            </a:r>
-            <a:endParaRPr lang="en-US" sz="900" dirty="0"/>
-          </a:p>
-          <a:p>
-            <a:pPr marL="342900" indent="-342900">
-              <a:spcAft>
-                <a:spcPts val="200"/>
-              </a:spcAft>
-              <a:buSzPct val="100000"/>
-              <a:buChar char="•"/>
-            </a:pPr>
-            <a:r>
-              <a:rPr lang="en-US" sz="900" dirty="0">
-                <a:solidFill>
-                  <a:srgbClr val="64748B"/>
-                </a:solidFill>
-                <a:latin typeface="Arial" pitchFamily="34" charset="0"/>
-                <a:ea typeface="Arial" pitchFamily="34" charset="-122"/>
-                <a:cs typeface="Arial" pitchFamily="34" charset="-120"/>
-              </a:rPr>
-              <a:t>配管の大規模メンテナンス</a:t>
-            </a:r>
-            <a:endParaRPr lang="en-US" sz="900" dirty="0"/>
-          </a:p>
-        </p:txBody>
-      </p:sp>
-      <p:sp>
-        <p:nvSpPr>
-          <p:cNvPr id="21" name="Text 19"/>
-          <p:cNvSpPr/>
-          <p:nvPr/>
-        </p:nvSpPr>
-        <p:spPr>
-          <a:xfrm>
-            <a:off x="4892040" y="3749040"/>
-            <a:ext cx="3474720" cy="274320"/>
-          </a:xfrm>
-          <a:prstGeom prst="rect">
-            <a:avLst/>
-          </a:prstGeom>
-          <a:noFill/>
-          <a:ln/>
-        </p:spPr>
-        <p:txBody>
-          <a:bodyPr wrap="square" lIns="0" tIns="0" rIns="0" bIns="0" rtlCol="0" anchor="ctr"/>
-          <a:lstStyle/>
-          <a:p>
-            <a:pPr indent="0" marL="0">
-              <a:buNone/>
-            </a:pPr>
-            <a:r>
-              <a:rPr lang="en-US" sz="1000" b="1" dirty="0">
-                <a:solidFill>
-                  <a:srgbClr val="1A2744"/>
-                </a:solidFill>
-                <a:latin typeface="Arial" pitchFamily="34" charset="0"/>
-                <a:ea typeface="Arial" pitchFamily="34" charset="-122"/>
-                <a:cs typeface="Arial" pitchFamily="34" charset="-120"/>
-              </a:rPr>
-              <a:t>段階的リノベーション</a:t>
-            </a:r>
-            <a:endParaRPr lang="en-US" sz="1000" dirty="0"/>
-          </a:p>
-        </p:txBody>
-      </p:sp>
-      <p:sp>
-        <p:nvSpPr>
-          <p:cNvPr id="22" name="Text 20"/>
-          <p:cNvSpPr/>
-          <p:nvPr/>
-        </p:nvSpPr>
-        <p:spPr>
-          <a:xfrm>
-            <a:off x="4892040" y="4005072"/>
-            <a:ext cx="3474720" cy="694944"/>
-          </a:xfrm>
-          <a:prstGeom prst="rect">
-            <a:avLst/>
-          </a:prstGeom>
-          <a:noFill/>
-          <a:ln/>
-        </p:spPr>
-        <p:txBody>
-          <a:bodyPr wrap="square" lIns="0" tIns="0" rIns="0" bIns="0" rtlCol="0" anchor="ctr"/>
-          <a:lstStyle/>
-          <a:p>
-            <a:pPr marL="342900" indent="-342900">
-              <a:spcAft>
-                <a:spcPts val="200"/>
-              </a:spcAft>
-              <a:buSzPct val="100000"/>
-              <a:buChar char="•"/>
-            </a:pPr>
-            <a:r>
-              <a:rPr lang="en-US" sz="900" dirty="0">
-                <a:solidFill>
-                  <a:srgbClr val="64748B"/>
-                </a:solidFill>
-                <a:latin typeface="Arial" pitchFamily="34" charset="0"/>
-                <a:ea typeface="Arial" pitchFamily="34" charset="-122"/>
-                <a:cs typeface="Arial" pitchFamily="34" charset="-120"/>
-              </a:rPr>
-              <a:t>最老朽フロアからの改修計画策定</a:t>
-            </a:r>
-            <a:endParaRPr lang="en-US" sz="900" dirty="0"/>
-          </a:p>
-          <a:p>
-            <a:pPr marL="342900" indent="-342900">
-              <a:spcAft>
-                <a:spcPts val="200"/>
-              </a:spcAft>
-              <a:buSzPct val="100000"/>
-              <a:buChar char="•"/>
-            </a:pPr>
-            <a:r>
-              <a:rPr lang="en-US" sz="900" dirty="0">
-                <a:solidFill>
-                  <a:srgbClr val="64748B"/>
-                </a:solidFill>
-                <a:latin typeface="Arial" pitchFamily="34" charset="0"/>
-                <a:ea typeface="Arial" pitchFamily="34" charset="-122"/>
-                <a:cs typeface="Arial" pitchFamily="34" charset="-120"/>
-              </a:rPr>
-              <a:t>モダンインテリアへの刷新</a:t>
-            </a:r>
-            <a:endParaRPr lang="en-US" sz="900" dirty="0"/>
-          </a:p>
-          <a:p>
-            <a:pPr marL="342900" indent="-342900">
-              <a:spcAft>
-                <a:spcPts val="200"/>
-              </a:spcAft>
-              <a:buSzPct val="100000"/>
-              <a:buChar char="•"/>
-            </a:pPr>
-            <a:r>
-              <a:rPr lang="en-US" sz="900" dirty="0">
-                <a:solidFill>
-                  <a:srgbClr val="64748B"/>
-                </a:solidFill>
-                <a:latin typeface="Arial" pitchFamily="34" charset="0"/>
-                <a:ea typeface="Arial" pitchFamily="34" charset="-122"/>
-                <a:cs typeface="Arial" pitchFamily="34" charset="-120"/>
-              </a:rPr>
-              <a:t>デジタルインフラ（USB/WiFi）整備</a:t>
+              <a:t>朝食スペースの拡充・リデザイン</a:t>
             </a:r>
             <a:endParaRPr lang="en-US" sz="900" dirty="0"/>
           </a:p>
@@ -14806,7 +13818,7 @@
                           <a:ea typeface="Arial" pitchFamily="34" charset="-122"/>
                           <a:cs typeface="Arial" pitchFamily="34" charset="-120"/>
                         </a:rPr>
-                        <a:t>全体平均評価(10pt)</a:t>
+                        <a:t>全体平均(10pt換算)</a:t>
                       </a:r>
                       <a:endParaRPr lang="en-US" sz="1000" dirty="0">
                         <a:latin typeface="Arial" charset="0"/>
@@ -15216,7 +14228,7 @@
                           <a:ea typeface="Arial" pitchFamily="34" charset="-122"/>
                           <a:cs typeface="Arial" pitchFamily="34" charset="-120"/>
                         </a:rPr>
-                        <a:t>65%以上</a:t>
+                        <a:t>68%以上</a:t>
                       </a:r>
                       <a:endParaRPr lang="en-US" sz="1000" dirty="0">
                         <a:latin typeface="Arial" charset="0"/>
@@ -15490,7 +14502,7 @@
                           <a:ea typeface="Arial" pitchFamily="34" charset="-122"/>
                           <a:cs typeface="Arial" pitchFamily="34" charset="-120"/>
                         </a:rPr>
-                        <a:t>15%以下</a:t>
+                        <a:t>10%以下</a:t>
                       </a:r>
                       <a:endParaRPr lang="en-US" sz="1000" dirty="0">
                         <a:latin typeface="Arial" charset="0"/>
@@ -15628,7 +14640,7 @@
                           <a:ea typeface="Arial" pitchFamily="34" charset="-122"/>
                           <a:cs typeface="Arial" pitchFamily="34" charset="-120"/>
                         </a:rPr>
-                        <a:t>楽天トラベル平均</a:t>
+                        <a:t>Google平均評価</a:t>
                       </a:r>
                       <a:endParaRPr lang="en-US" sz="1000" dirty="0">
                         <a:latin typeface="Arial" charset="0"/>
@@ -15696,7 +14708,7 @@
                           <a:ea typeface="Arial" pitchFamily="34" charset="-122"/>
                           <a:cs typeface="Arial" pitchFamily="34" charset="-120"/>
                         </a:rPr>
-                        <a:t>3.53/5点</a:t>
+                        <a:t>3.08/5点</a:t>
                       </a:r>
                       <a:endParaRPr lang="en-US" sz="1000" dirty="0">
                         <a:latin typeface="Arial" charset="0"/>
@@ -15902,7 +14914,7 @@
                           <a:ea typeface="Arial" pitchFamily="34" charset="-122"/>
                           <a:cs typeface="Arial" pitchFamily="34" charset="-120"/>
                         </a:rPr>
-                        <a:t>Google評価</a:t>
+                        <a:t>じゃらん平均評価</a:t>
                       </a:r>
                       <a:endParaRPr lang="en-US" sz="1000" dirty="0">
                         <a:latin typeface="Arial" charset="0"/>
@@ -15970,7 +14982,7 @@
                           <a:ea typeface="Arial" pitchFamily="34" charset="-122"/>
                           <a:cs typeface="Arial" pitchFamily="34" charset="-120"/>
                         </a:rPr>
-                        <a:t>3.08/5点</a:t>
+                        <a:t>3.43/5点</a:t>
                       </a:r>
                       <a:endParaRPr lang="en-US" sz="1000" dirty="0">
                         <a:latin typeface="Arial" charset="0"/>
@@ -16038,7 +15050,7 @@
                           <a:ea typeface="Arial" pitchFamily="34" charset="-122"/>
                           <a:cs typeface="Arial" pitchFamily="34" charset="-120"/>
                         </a:rPr>
-                        <a:t>3.5/5点以上</a:t>
+                        <a:t>3.8/5点以上</a:t>
                       </a:r>
                       <a:endParaRPr lang="en-US" sz="1000" dirty="0">
                         <a:latin typeface="Arial" charset="0"/>
@@ -16432,6 +15444,280 @@
                   </a:tcPr>
                 </a:tc>
               </a:tr>
+              <a:tr h="320040">
+                <a:tc>
+                  <a:txBody>
+                    <a:bodyPr/>
+                    <a:lstStyle/>
+                    <a:p>
+                      <a:pPr indent="0" marL="0">
+                        <a:buNone/>
+                      </a:pPr>
+                      <a:r>
+                        <a:rPr lang="en-US" sz="1000" b="1" dirty="0">
+                          <a:solidFill>
+                            <a:srgbClr val="334155"/>
+                          </a:solidFill>
+                          <a:latin typeface="Arial" pitchFamily="34" charset="0"/>
+                          <a:ea typeface="Arial" pitchFamily="34" charset="-122"/>
+                          <a:cs typeface="Arial" pitchFamily="34" charset="-120"/>
+                        </a:rPr>
+                        <a:t>設備クレーム件数</a:t>
+                      </a:r>
+                      <a:endParaRPr lang="en-US" sz="1000" dirty="0">
+                        <a:latin typeface="Arial" charset="0"/>
+                        <a:ea typeface="Arial" charset="0"/>
+                        <a:cs typeface="Arial" charset="0"/>
+                      </a:endParaRPr>
+                    </a:p>
+                  </a:txBody>
+                  <a:tcPr marL="91440" marR="91440" marT="45720" marB="45720">
+                    <a:lnL w="6350" cap="flat" cmpd="sng" algn="ctr">
+                      <a:solidFill>
+                        <a:srgbClr val="CBD5E1"/>
+                      </a:solidFill>
+                      <a:prstDash val="solid"/>
+                      <a:round/>
+                      <a:headEnd type="none" w="med" len="med"/>
+                      <a:tailEnd type="none" w="med" len="med"/>
+                    </a:lnL>
+                    <a:lnR w="6350" cap="flat" cmpd="sng" algn="ctr">
+                      <a:solidFill>
+                        <a:srgbClr val="CBD5E1"/>
+                      </a:solidFill>
+                      <a:prstDash val="solid"/>
+                      <a:round/>
+                      <a:headEnd type="none" w="med" len="med"/>
+                      <a:tailEnd type="none" w="med" len="med"/>
+                    </a:lnR>
+                    <a:lnT w="6350" cap="flat" cmpd="sng" algn="ctr">
+                      <a:solidFill>
+                        <a:srgbClr val="CBD5E1"/>
+                      </a:solidFill>
+                      <a:prstDash val="solid"/>
+                      <a:round/>
+                      <a:headEnd type="none" w="med" len="med"/>
+                      <a:tailEnd type="none" w="med" len="med"/>
+                    </a:lnT>
+                    <a:lnB w="6350" cap="flat" cmpd="sng" algn="ctr">
+                      <a:solidFill>
+                        <a:srgbClr val="CBD5E1"/>
+                      </a:solidFill>
+                      <a:prstDash val="solid"/>
+                      <a:round/>
+                      <a:headEnd type="none" w="med" len="med"/>
+                      <a:tailEnd type="none" w="med" len="med"/>
+                    </a:lnB>
+                    <a:solidFill>
+                      <a:srgbClr val="E8EFF8"/>
+                    </a:solidFill>
+                  </a:tcPr>
+                </a:tc>
+                <a:tc>
+                  <a:txBody>
+                    <a:bodyPr/>
+                    <a:lstStyle/>
+                    <a:p>
+                      <a:pPr algn="ctr" indent="0" marL="0">
+                        <a:buNone/>
+                      </a:pPr>
+                      <a:r>
+                        <a:rPr lang="en-US" sz="1000" dirty="0">
+                          <a:solidFill>
+                            <a:srgbClr val="64748B"/>
+                          </a:solidFill>
+                          <a:latin typeface="Arial" pitchFamily="34" charset="0"/>
+                          <a:ea typeface="Arial" pitchFamily="34" charset="-122"/>
+                          <a:cs typeface="Arial" pitchFamily="34" charset="-120"/>
+                        </a:rPr>
+                        <a:t>10件/2ヶ月</a:t>
+                      </a:r>
+                      <a:endParaRPr lang="en-US" sz="1000" dirty="0">
+                        <a:latin typeface="Arial" charset="0"/>
+                        <a:ea typeface="Arial" charset="0"/>
+                        <a:cs typeface="Arial" charset="0"/>
+                      </a:endParaRPr>
+                    </a:p>
+                  </a:txBody>
+                  <a:tcPr marL="91440" marR="91440" marT="45720" marB="45720">
+                    <a:lnL w="6350" cap="flat" cmpd="sng" algn="ctr">
+                      <a:solidFill>
+                        <a:srgbClr val="CBD5E1"/>
+                      </a:solidFill>
+                      <a:prstDash val="solid"/>
+                      <a:round/>
+                      <a:headEnd type="none" w="med" len="med"/>
+                      <a:tailEnd type="none" w="med" len="med"/>
+                    </a:lnL>
+                    <a:lnR w="6350" cap="flat" cmpd="sng" algn="ctr">
+                      <a:solidFill>
+                        <a:srgbClr val="CBD5E1"/>
+                      </a:solidFill>
+                      <a:prstDash val="solid"/>
+                      <a:round/>
+                      <a:headEnd type="none" w="med" len="med"/>
+                      <a:tailEnd type="none" w="med" len="med"/>
+                    </a:lnR>
+                    <a:lnT w="6350" cap="flat" cmpd="sng" algn="ctr">
+                      <a:solidFill>
+                        <a:srgbClr val="CBD5E1"/>
+                      </a:solidFill>
+                      <a:prstDash val="solid"/>
+                      <a:round/>
+                      <a:headEnd type="none" w="med" len="med"/>
+                      <a:tailEnd type="none" w="med" len="med"/>
+                    </a:lnT>
+                    <a:lnB w="6350" cap="flat" cmpd="sng" algn="ctr">
+                      <a:solidFill>
+                        <a:srgbClr val="CBD5E1"/>
+                      </a:solidFill>
+                      <a:prstDash val="solid"/>
+                      <a:round/>
+                      <a:headEnd type="none" w="med" len="med"/>
+                      <a:tailEnd type="none" w="med" len="med"/>
+                    </a:lnB>
+                    <a:solidFill>
+                      <a:srgbClr val="E8EFF8"/>
+                    </a:solidFill>
+                  </a:tcPr>
+                </a:tc>
+                <a:tc>
+                  <a:txBody>
+                    <a:bodyPr/>
+                    <a:lstStyle/>
+                    <a:p>
+                      <a:pPr algn="ctr" indent="0" marL="0">
+                        <a:buNone/>
+                      </a:pPr>
+                      <a:r>
+                        <a:rPr lang="en-US" sz="1000" b="1" dirty="0">
+                          <a:solidFill>
+                            <a:srgbClr val="16A34A"/>
+                          </a:solidFill>
+                          <a:latin typeface="Arial" pitchFamily="34" charset="0"/>
+                          <a:ea typeface="Arial" pitchFamily="34" charset="-122"/>
+                          <a:cs typeface="Arial" pitchFamily="34" charset="-120"/>
+                        </a:rPr>
+                        <a:t>3件以下/2ヶ月</a:t>
+                      </a:r>
+                      <a:endParaRPr lang="en-US" sz="1000" dirty="0">
+                        <a:latin typeface="Arial" charset="0"/>
+                        <a:ea typeface="Arial" charset="0"/>
+                        <a:cs typeface="Arial" charset="0"/>
+                      </a:endParaRPr>
+                    </a:p>
+                  </a:txBody>
+                  <a:tcPr marL="91440" marR="91440" marT="45720" marB="45720">
+                    <a:lnL w="6350" cap="flat" cmpd="sng" algn="ctr">
+                      <a:solidFill>
+                        <a:srgbClr val="CBD5E1"/>
+                      </a:solidFill>
+                      <a:prstDash val="solid"/>
+                      <a:round/>
+                      <a:headEnd type="none" w="med" len="med"/>
+                      <a:tailEnd type="none" w="med" len="med"/>
+                    </a:lnL>
+                    <a:lnR w="6350" cap="flat" cmpd="sng" algn="ctr">
+                      <a:solidFill>
+                        <a:srgbClr val="CBD5E1"/>
+                      </a:solidFill>
+                      <a:prstDash val="solid"/>
+                      <a:round/>
+                      <a:headEnd type="none" w="med" len="med"/>
+                      <a:tailEnd type="none" w="med" len="med"/>
+                    </a:lnR>
+                    <a:lnT w="6350" cap="flat" cmpd="sng" algn="ctr">
+                      <a:solidFill>
+                        <a:srgbClr val="CBD5E1"/>
+                      </a:solidFill>
+                      <a:prstDash val="solid"/>
+                      <a:round/>
+                      <a:headEnd type="none" w="med" len="med"/>
+                      <a:tailEnd type="none" w="med" len="med"/>
+                    </a:lnT>
+                    <a:lnB w="6350" cap="flat" cmpd="sng" algn="ctr">
+                      <a:solidFill>
+                        <a:srgbClr val="CBD5E1"/>
+                      </a:solidFill>
+                      <a:prstDash val="solid"/>
+                      <a:round/>
+                      <a:headEnd type="none" w="med" len="med"/>
+                      <a:tailEnd type="none" w="med" len="med"/>
+                    </a:lnB>
+                    <a:solidFill>
+                      <a:srgbClr val="E8EFF8"/>
+                    </a:solidFill>
+                  </a:tcPr>
+                </a:tc>
+                <a:tc>
+                  <a:txBody>
+                    <a:bodyPr/>
+                    <a:lstStyle/>
+                    <a:p>
+                      <a:pPr algn="ctr" indent="0" marL="0">
+                        <a:buNone/>
+                      </a:pPr>
+                      <a:r>
+                        <a:rPr lang="en-US" sz="1000" dirty="0">
+                          <a:solidFill>
+                            <a:srgbClr val="64748B"/>
+                          </a:solidFill>
+                          <a:latin typeface="Arial" pitchFamily="34" charset="0"/>
+                          <a:ea typeface="Arial" pitchFamily="34" charset="-122"/>
+                          <a:cs typeface="Arial" pitchFamily="34" charset="-120"/>
+                        </a:rPr>
+                        <a:t>2026年9月</a:t>
+                      </a:r>
+                      <a:endParaRPr lang="en-US" sz="1000" dirty="0">
+                        <a:latin typeface="Arial" charset="0"/>
+                        <a:ea typeface="Arial" charset="0"/>
+                        <a:cs typeface="Arial" charset="0"/>
+                      </a:endParaRPr>
+                    </a:p>
+                  </a:txBody>
+                  <a:tcPr marL="91440" marR="91440" marT="45720" marB="45720">
+                    <a:lnL w="6350" cap="flat" cmpd="sng" algn="ctr">
+                      <a:solidFill>
+                        <a:srgbClr val="CBD5E1"/>
+                      </a:solidFill>
+                      <a:prstDash val="solid"/>
+                      <a:round/>
+                      <a:headEnd type="none" w="med" len="med"/>
+                      <a:tailEnd type="none" w="med" len="med"/>
+                    </a:lnL>
+                    <a:lnR w="6350" cap="flat" cmpd="sng" algn="ctr">
+                      <a:solidFill>
+                        <a:srgbClr val="CBD5E1"/>
+                      </a:solidFill>
+                      <a:prstDash val="solid"/>
+                      <a:round/>
+                      <a:headEnd type="none" w="med" len="med"/>
+                      <a:tailEnd type="none" w="med" len="med"/>
+                    </a:lnR>
+                    <a:lnT w="6350" cap="flat" cmpd="sng" algn="ctr">
+                      <a:solidFill>
+                        <a:srgbClr val="CBD5E1"/>
+                      </a:solidFill>
+                      <a:prstDash val="solid"/>
+                      <a:round/>
+                      <a:headEnd type="none" w="med" len="med"/>
+                      <a:tailEnd type="none" w="med" len="med"/>
+                    </a:lnT>
+                    <a:lnB w="6350" cap="flat" cmpd="sng" algn="ctr">
+                      <a:solidFill>
+                        <a:srgbClr val="CBD5E1"/>
+                      </a:solidFill>
+                      <a:prstDash val="solid"/>
+                      <a:round/>
+                      <a:headEnd type="none" w="med" len="med"/>
+                      <a:tailEnd type="none" w="med" len="med"/>
+                    </a:lnB>
+                    <a:solidFill>
+                      <a:srgbClr val="E8EFF8"/>
+                    </a:solidFill>
+                  </a:tcPr>
+                </a:tc>
+              </a:tr>
             </a:tbl>
           </a:graphicData>
         </a:graphic>
@@ -16444,8 +15730,8 @@
         </p:nvSpPr>
         <p:spPr>
           <a:xfrm>
-            <a:off x="457200" y="3520440"/>
-            <a:ext cx="8229600" cy="548640"/>
+            <a:off x="457200" y="3886200"/>
+            <a:ext cx="8229600" cy="640080"/>
           </a:xfrm>
           <a:prstGeom prst="rect">
             <a:avLst/>
@@ -16471,8 +15757,8 @@
         </p:nvSpPr>
         <p:spPr>
           <a:xfrm>
-            <a:off x="457200" y="3520440"/>
-            <a:ext cx="54864" cy="548640"/>
+            <a:off x="457200" y="3886200"/>
+            <a:ext cx="54864" cy="640080"/>
           </a:xfrm>
           <a:prstGeom prst="rect">
             <a:avLst/>
@@ -16491,8 +15777,8 @@
         </p:nvSpPr>
         <p:spPr>
           <a:xfrm>
-            <a:off x="640080" y="3520440"/>
-            <a:ext cx="7863840" cy="548640"/>
+            <a:off x="640080" y="3886200"/>
+            <a:ext cx="7863840" cy="640080"/>
           </a:xfrm>
           <a:prstGeom prst="rect">
             <a:avLst/>
@@ -16530,7 +15816,7 @@
                 <a:ea typeface="Arial" pitchFamily="34" charset="-122"/>
                 <a:cs typeface="Arial" pitchFamily="34" charset="-120"/>
               </a:rPr>
-              <a:t>四半期ごとにKPIをレビューし、目標未達の場合は追加施策を検討。月次で口コミモニタリングを実施し、新たな課題の早期発見に努める。</a:t>
+              <a:t>毎月末に全サイトの口コミを収集・集計。設備クレーム件数とGoogleスコアの改善状況を重点モニタリング。リノベーション前後の評価変化を追跡します。</a:t>
             </a:r>
             <a:endParaRPr lang="en-US" sz="1000" dirty="0"/>
           </a:p>

--- a/納品レポート/ホテル別レポート/チサンホテル浜松町_口コミ分析レポート.pptx
+++ b/納品レポート/ホテル別レポート/チサンホテル浜松町_口コミ分析レポート.pptx
@@ -2720,7 +2720,7 @@
                 <a:ea typeface="Arial" pitchFamily="34" charset="-122"/>
                 <a:cs typeface="Arial" pitchFamily="34" charset="-120"/>
               </a:rPr>
-              <a:t>分析対象期間：2025年12月〜2026年3月</a:t>
+              <a:t>分析対象期間：2025年12月〜2026年4月</a:t>
             </a:r>
             <a:endParaRPr lang="en-US" sz="1000" dirty="0"/>
           </a:p>
@@ -2760,7 +2760,7 @@
                 <a:ea typeface="Arial" pitchFamily="34" charset="-122"/>
                 <a:cs typeface="Arial" pitchFamily="34" charset="-120"/>
               </a:rPr>
-              <a:t>作成日：2026年4月3日</a:t>
+              <a:t>作成日：2026年4月12日</a:t>
             </a:r>
             <a:endParaRPr lang="en-US" sz="1000" dirty="0"/>
           </a:p>
@@ -2939,7 +2939,7 @@
                 <a:ea typeface="Arial" pitchFamily="34" charset="-122"/>
                 <a:cs typeface="Arial" pitchFamily="34" charset="-120"/>
               </a:rPr>
-              <a:t>チサンホテル浜松町の2025年12月〜2026年3月口コミ分析（54件）では、総合評価6.52点（10pt換算）、高評価率46.3%という結果が得られました。</a:t>
+              <a:t>チサンホテル浜松町の2025年12月〜2026年4月口コミ分析（54件）では、総合評価6.52点（10pt換算）、高評価率46.3%という結果が得られました。</a:t>
             </a:r>
             <a:endParaRPr lang="en-US" sz="1200" dirty="0"/>
           </a:p>
